--- a/Job_Searching.pptx
+++ b/Job_Searching.pptx
@@ -211,7 +211,7 @@
           </a:lstStyle>
           <a:p>
             <a:fld id="{610AF671-4685-124D-A41D-446D235EA8CE}" type="datetimeFigureOut">
-              <a:t>9/18/22</a:t>
+              <a:t>9/19/22</a:t>
             </a:fld>
             <a:endParaRPr lang="en-US"/>
           </a:p>
@@ -624,7 +624,7 @@
           <a:p>
             <a:fld id="{2D90B581-06C6-5A4B-9E30-3EAD5667F4B3}" type="datetimeFigureOut">
               <a:rPr lang="en-US" smtClean="0"/>
-              <a:t>9/18/22</a:t>
+              <a:t>9/19/22</a:t>
             </a:fld>
             <a:endParaRPr lang="en-US"/>
           </a:p>
@@ -822,7 +822,7 @@
           <a:p>
             <a:fld id="{2D90B581-06C6-5A4B-9E30-3EAD5667F4B3}" type="datetimeFigureOut">
               <a:rPr lang="en-US" smtClean="0"/>
-              <a:t>9/18/22</a:t>
+              <a:t>9/19/22</a:t>
             </a:fld>
             <a:endParaRPr lang="en-US"/>
           </a:p>
@@ -1030,7 +1030,7 @@
           <a:p>
             <a:fld id="{2D90B581-06C6-5A4B-9E30-3EAD5667F4B3}" type="datetimeFigureOut">
               <a:rPr lang="en-US" smtClean="0"/>
-              <a:t>9/18/22</a:t>
+              <a:t>9/19/22</a:t>
             </a:fld>
             <a:endParaRPr lang="en-US"/>
           </a:p>
@@ -1228,7 +1228,7 @@
           <a:p>
             <a:fld id="{2D90B581-06C6-5A4B-9E30-3EAD5667F4B3}" type="datetimeFigureOut">
               <a:rPr lang="en-US" smtClean="0"/>
-              <a:t>9/18/22</a:t>
+              <a:t>9/19/22</a:t>
             </a:fld>
             <a:endParaRPr lang="en-US"/>
           </a:p>
@@ -1503,7 +1503,7 @@
           <a:p>
             <a:fld id="{2D90B581-06C6-5A4B-9E30-3EAD5667F4B3}" type="datetimeFigureOut">
               <a:rPr lang="en-US" smtClean="0"/>
-              <a:t>9/18/22</a:t>
+              <a:t>9/19/22</a:t>
             </a:fld>
             <a:endParaRPr lang="en-US"/>
           </a:p>
@@ -1768,7 +1768,7 @@
           <a:p>
             <a:fld id="{2D90B581-06C6-5A4B-9E30-3EAD5667F4B3}" type="datetimeFigureOut">
               <a:rPr lang="en-US" smtClean="0"/>
-              <a:t>9/18/22</a:t>
+              <a:t>9/19/22</a:t>
             </a:fld>
             <a:endParaRPr lang="en-US"/>
           </a:p>
@@ -2180,7 +2180,7 @@
           <a:p>
             <a:fld id="{2D90B581-06C6-5A4B-9E30-3EAD5667F4B3}" type="datetimeFigureOut">
               <a:rPr lang="en-US" smtClean="0"/>
-              <a:t>9/18/22</a:t>
+              <a:t>9/19/22</a:t>
             </a:fld>
             <a:endParaRPr lang="en-US"/>
           </a:p>
@@ -2321,7 +2321,7 @@
           <a:p>
             <a:fld id="{2D90B581-06C6-5A4B-9E30-3EAD5667F4B3}" type="datetimeFigureOut">
               <a:rPr lang="en-US" smtClean="0"/>
-              <a:t>9/18/22</a:t>
+              <a:t>9/19/22</a:t>
             </a:fld>
             <a:endParaRPr lang="en-US"/>
           </a:p>
@@ -2434,7 +2434,7 @@
           <a:p>
             <a:fld id="{2D90B581-06C6-5A4B-9E30-3EAD5667F4B3}" type="datetimeFigureOut">
               <a:rPr lang="en-US" smtClean="0"/>
-              <a:t>9/18/22</a:t>
+              <a:t>9/19/22</a:t>
             </a:fld>
             <a:endParaRPr lang="en-US"/>
           </a:p>
@@ -2745,7 +2745,7 @@
           <a:p>
             <a:fld id="{2D90B581-06C6-5A4B-9E30-3EAD5667F4B3}" type="datetimeFigureOut">
               <a:rPr lang="en-US" smtClean="0"/>
-              <a:t>9/18/22</a:t>
+              <a:t>9/19/22</a:t>
             </a:fld>
             <a:endParaRPr lang="en-US"/>
           </a:p>
@@ -3033,7 +3033,7 @@
           <a:p>
             <a:fld id="{2D90B581-06C6-5A4B-9E30-3EAD5667F4B3}" type="datetimeFigureOut">
               <a:rPr lang="en-US" smtClean="0"/>
-              <a:t>9/18/22</a:t>
+              <a:t>9/19/22</a:t>
             </a:fld>
             <a:endParaRPr lang="en-US"/>
           </a:p>
@@ -3274,7 +3274,7 @@
           <a:p>
             <a:fld id="{2D90B581-06C6-5A4B-9E30-3EAD5667F4B3}" type="datetimeFigureOut">
               <a:rPr lang="en-US" smtClean="0"/>
-              <a:t>9/18/22</a:t>
+              <a:t>9/19/22</a:t>
             </a:fld>
             <a:endParaRPr lang="en-US"/>
           </a:p>
@@ -4193,8 +4193,8 @@
         </p:nvSpPr>
         <p:spPr>
           <a:xfrm>
-            <a:off x="2752866" y="1937888"/>
-            <a:ext cx="7272670" cy="3539430"/>
+            <a:off x="126670" y="923629"/>
+            <a:ext cx="3965189" cy="5047536"/>
           </a:xfrm>
           <a:prstGeom prst="rect">
             <a:avLst/>
@@ -4233,37 +4233,77 @@
           </a:p>
           <a:p>
             <a:r>
-              <a:rPr lang="en-US" sz="1400"/>
+              <a:rPr lang="en-US" sz="1400" b="1">
+                <a:solidFill>
+                  <a:srgbClr val="00B0F0"/>
+                </a:solidFill>
+              </a:rPr>
               <a:t>  N1 people found you</a:t>
             </a:r>
           </a:p>
           <a:p>
             <a:r>
-              <a:rPr lang="en-US" sz="1400"/>
-              <a:t>  N2 people contacted you for preliminary conversation</a:t>
-            </a:r>
-          </a:p>
-          <a:p>
-            <a:r>
-              <a:rPr lang="en-US" sz="1400"/>
+              <a:rPr lang="en-US" sz="1400" b="1">
+                <a:solidFill>
+                  <a:srgbClr val="00B0F0"/>
+                </a:solidFill>
+              </a:rPr>
+              <a:t>  N2 people contacted/spoke with you</a:t>
+            </a:r>
+          </a:p>
+          <a:p>
+            <a:r>
+              <a:rPr lang="en-US" sz="1400" b="1">
+                <a:solidFill>
+                  <a:srgbClr val="00B0F0"/>
+                </a:solidFill>
+              </a:rPr>
               <a:t>  N3 people submitted you for a job</a:t>
             </a:r>
           </a:p>
           <a:p>
             <a:r>
-              <a:rPr lang="en-US" sz="1400"/>
-              <a:t>  N4 companies decided to invite you for an interview</a:t>
-            </a:r>
-          </a:p>
-          <a:p>
-            <a:r>
-              <a:rPr lang="en-US" sz="1400"/>
-              <a:t>  N5 companies decided to invite to 2nd, ... interview</a:t>
-            </a:r>
-          </a:p>
-          <a:p>
-            <a:r>
-              <a:rPr lang="en-US" sz="1400"/>
+              <a:rPr lang="en-US" sz="1400">
+                <a:solidFill>
+                  <a:srgbClr val="00B050"/>
+                </a:solidFill>
+              </a:rPr>
+              <a:t>  N4 companies invited you for an interview</a:t>
+            </a:r>
+          </a:p>
+          <a:p>
+            <a:r>
+              <a:rPr lang="en-US" sz="1400">
+                <a:solidFill>
+                  <a:srgbClr val="00B050"/>
+                </a:solidFill>
+              </a:rPr>
+              <a:t>  N5 companies invited for a 2</a:t>
+            </a:r>
+            <a:r>
+              <a:rPr lang="en-US" sz="1400" baseline="30000">
+                <a:solidFill>
+                  <a:srgbClr val="00B050"/>
+                </a:solidFill>
+              </a:rPr>
+              <a:t>nd</a:t>
+            </a:r>
+            <a:r>
+              <a:rPr lang="en-US" sz="1400">
+                <a:solidFill>
+                  <a:srgbClr val="00B050"/>
+                </a:solidFill>
+              </a:rPr>
+              <a:t> interview</a:t>
+            </a:r>
+          </a:p>
+          <a:p>
+            <a:r>
+              <a:rPr lang="en-US" sz="1400">
+                <a:solidFill>
+                  <a:srgbClr val="00B050"/>
+                </a:solidFill>
+              </a:rPr>
               <a:t>  N6 companies gave you a job offer</a:t>
             </a:r>
           </a:p>
@@ -4281,8 +4321,16 @@
           </a:p>
           <a:p>
             <a:r>
-              <a:rPr lang="en-US" sz="1400"/>
-              <a:t>So majority of your time will be spent on N1, N2 - unless you will find a way to effectively automate it.</a:t>
+              <a:rPr lang="en-US" sz="1400" b="1">
+                <a:solidFill>
+                  <a:srgbClr val="FF0000"/>
+                </a:solidFill>
+              </a:rPr>
+              <a:t>Majority of your time will be spent on N1..N3</a:t>
+            </a:r>
+            <a:r>
+              <a:rPr lang="en-US" sz="1400"/>
+              <a:t> </a:t>
             </a:r>
           </a:p>
           <a:p>
@@ -4291,7 +4339,28 @@
           <a:p>
             <a:r>
               <a:rPr lang="en-US" sz="1400"/>
-              <a:t>If you get enough visibility and traffic for N1, N2,... - then job offers will follow automatically.</a:t>
+              <a:t>You need to automate N1-N3 as much as possible (for time management).</a:t>
+            </a:r>
+          </a:p>
+          <a:p>
+            <a:endParaRPr lang="en-US" sz="1400"/>
+          </a:p>
+          <a:p>
+            <a:r>
+              <a:rPr lang="en-US" sz="1400"/>
+              <a:t>Big N1 number is the key.</a:t>
+            </a:r>
+          </a:p>
+          <a:p>
+            <a:r>
+              <a:rPr lang="en-US" sz="1400"/>
+              <a:t>Good way to automate – increase your visibility (Linkedin Posts, YouTube videos, Medium articles, etc.). </a:t>
+            </a:r>
+          </a:p>
+          <a:p>
+            <a:r>
+              <a:rPr lang="en-US" sz="1400"/>
+              <a:t>If you get enough N1 traffic, then job offers will follow automatically.</a:t>
             </a:r>
           </a:p>
         </p:txBody>
@@ -4326,8 +4395,434 @@
           <a:p>
             <a:r>
               <a:rPr lang="en-US" sz="2800" b="1"/>
-              <a:t>Looking for a job is all about time management</a:t>
-            </a:r>
+              <a:t>Looking for a job is about time management</a:t>
+            </a:r>
+          </a:p>
+        </p:txBody>
+      </p:sp>
+      <p:sp>
+        <p:nvSpPr>
+          <p:cNvPr id="4" name="TextBox 3">
+            <a:extLst>
+              <a:ext uri="{FF2B5EF4-FFF2-40B4-BE49-F238E27FC236}">
+                <a16:creationId xmlns:a16="http://schemas.microsoft.com/office/drawing/2014/main" id="{18E3A884-3B89-DA81-DE60-9FC27EED63FA}"/>
+              </a:ext>
+            </a:extLst>
+          </p:cNvPr>
+          <p:cNvSpPr txBox="1"/>
+          <p:nvPr/>
+        </p:nvSpPr>
+        <p:spPr>
+          <a:xfrm>
+            <a:off x="4568959" y="1551563"/>
+            <a:ext cx="5525065" cy="707886"/>
+          </a:xfrm>
+          <a:prstGeom prst="rect">
+            <a:avLst/>
+          </a:prstGeom>
+          <a:solidFill>
+            <a:schemeClr val="accent1">
+              <a:lumMod val="20000"/>
+              <a:lumOff val="80000"/>
+            </a:schemeClr>
+          </a:solidFill>
+          <a:ln>
+            <a:solidFill>
+              <a:srgbClr val="FF0000"/>
+            </a:solidFill>
+          </a:ln>
+        </p:spPr>
+        <p:txBody>
+          <a:bodyPr wrap="square" rtlCol="0">
+            <a:spAutoFit/>
+          </a:bodyPr>
+          <a:lstStyle/>
+          <a:p>
+            <a:pPr algn="ctr"/>
+            <a:r>
+              <a:rPr lang="en-US" sz="4000" b="1"/>
+              <a:t>N1</a:t>
+            </a:r>
+          </a:p>
+        </p:txBody>
+      </p:sp>
+      <p:sp>
+        <p:nvSpPr>
+          <p:cNvPr id="5" name="TextBox 4">
+            <a:extLst>
+              <a:ext uri="{FF2B5EF4-FFF2-40B4-BE49-F238E27FC236}">
+                <a16:creationId xmlns:a16="http://schemas.microsoft.com/office/drawing/2014/main" id="{CCDE8454-3144-5232-519A-F2FD6CEBBC5F}"/>
+              </a:ext>
+            </a:extLst>
+          </p:cNvPr>
+          <p:cNvSpPr txBox="1"/>
+          <p:nvPr/>
+        </p:nvSpPr>
+        <p:spPr>
+          <a:xfrm>
+            <a:off x="5447371" y="2339401"/>
+            <a:ext cx="3768241" cy="461665"/>
+          </a:xfrm>
+          <a:prstGeom prst="rect">
+            <a:avLst/>
+          </a:prstGeom>
+          <a:solidFill>
+            <a:schemeClr val="accent1">
+              <a:lumMod val="20000"/>
+              <a:lumOff val="80000"/>
+            </a:schemeClr>
+          </a:solidFill>
+          <a:ln>
+            <a:solidFill>
+              <a:srgbClr val="FF0000"/>
+            </a:solidFill>
+          </a:ln>
+        </p:spPr>
+        <p:txBody>
+          <a:bodyPr wrap="square" rtlCol="0">
+            <a:spAutoFit/>
+          </a:bodyPr>
+          <a:lstStyle/>
+          <a:p>
+            <a:pPr algn="ctr"/>
+            <a:r>
+              <a:rPr lang="en-US" sz="2400" b="1"/>
+              <a:t>N2</a:t>
+            </a:r>
+          </a:p>
+        </p:txBody>
+      </p:sp>
+      <p:sp>
+        <p:nvSpPr>
+          <p:cNvPr id="6" name="TextBox 5">
+            <a:extLst>
+              <a:ext uri="{FF2B5EF4-FFF2-40B4-BE49-F238E27FC236}">
+                <a16:creationId xmlns:a16="http://schemas.microsoft.com/office/drawing/2014/main" id="{9FD58CC6-B8C8-C1B4-E010-D0ADDA571727}"/>
+              </a:ext>
+            </a:extLst>
+          </p:cNvPr>
+          <p:cNvSpPr txBox="1"/>
+          <p:nvPr/>
+        </p:nvSpPr>
+        <p:spPr>
+          <a:xfrm>
+            <a:off x="6294052" y="2902032"/>
+            <a:ext cx="2074878" cy="369332"/>
+          </a:xfrm>
+          <a:prstGeom prst="rect">
+            <a:avLst/>
+          </a:prstGeom>
+          <a:solidFill>
+            <a:schemeClr val="accent1">
+              <a:lumMod val="20000"/>
+              <a:lumOff val="80000"/>
+            </a:schemeClr>
+          </a:solidFill>
+          <a:ln>
+            <a:solidFill>
+              <a:srgbClr val="FF0000"/>
+            </a:solidFill>
+          </a:ln>
+        </p:spPr>
+        <p:txBody>
+          <a:bodyPr wrap="square" rtlCol="0">
+            <a:spAutoFit/>
+          </a:bodyPr>
+          <a:lstStyle/>
+          <a:p>
+            <a:pPr algn="ctr"/>
+            <a:r>
+              <a:rPr lang="en-US" b="1"/>
+              <a:t>N3</a:t>
+            </a:r>
+          </a:p>
+        </p:txBody>
+      </p:sp>
+      <p:sp>
+        <p:nvSpPr>
+          <p:cNvPr id="7" name="TextBox 6">
+            <a:extLst>
+              <a:ext uri="{FF2B5EF4-FFF2-40B4-BE49-F238E27FC236}">
+                <a16:creationId xmlns:a16="http://schemas.microsoft.com/office/drawing/2014/main" id="{AB0DD960-53B3-533F-5EE6-3C18F8665384}"/>
+              </a:ext>
+            </a:extLst>
+          </p:cNvPr>
+          <p:cNvSpPr txBox="1"/>
+          <p:nvPr/>
+        </p:nvSpPr>
+        <p:spPr>
+          <a:xfrm>
+            <a:off x="6940485" y="3350671"/>
+            <a:ext cx="800978" cy="307777"/>
+          </a:xfrm>
+          <a:prstGeom prst="rect">
+            <a:avLst/>
+          </a:prstGeom>
+          <a:solidFill>
+            <a:schemeClr val="accent6">
+              <a:lumMod val="20000"/>
+              <a:lumOff val="80000"/>
+            </a:schemeClr>
+          </a:solidFill>
+          <a:ln>
+            <a:solidFill>
+              <a:srgbClr val="FF0000"/>
+            </a:solidFill>
+          </a:ln>
+        </p:spPr>
+        <p:txBody>
+          <a:bodyPr wrap="square" rtlCol="0">
+            <a:spAutoFit/>
+          </a:bodyPr>
+          <a:lstStyle/>
+          <a:p>
+            <a:pPr algn="ctr"/>
+            <a:r>
+              <a:rPr lang="en-US" sz="1400" b="1"/>
+              <a:t>N4</a:t>
+            </a:r>
+          </a:p>
+        </p:txBody>
+      </p:sp>
+      <p:sp>
+        <p:nvSpPr>
+          <p:cNvPr id="8" name="TextBox 7">
+            <a:extLst>
+              <a:ext uri="{FF2B5EF4-FFF2-40B4-BE49-F238E27FC236}">
+                <a16:creationId xmlns:a16="http://schemas.microsoft.com/office/drawing/2014/main" id="{3054114F-4E0A-D9B3-685F-161FB5BFC559}"/>
+              </a:ext>
+            </a:extLst>
+          </p:cNvPr>
+          <p:cNvSpPr txBox="1"/>
+          <p:nvPr/>
+        </p:nvSpPr>
+        <p:spPr>
+          <a:xfrm>
+            <a:off x="7100622" y="3737753"/>
+            <a:ext cx="461739" cy="253916"/>
+          </a:xfrm>
+          <a:prstGeom prst="rect">
+            <a:avLst/>
+          </a:prstGeom>
+          <a:solidFill>
+            <a:schemeClr val="accent6">
+              <a:lumMod val="20000"/>
+              <a:lumOff val="80000"/>
+            </a:schemeClr>
+          </a:solidFill>
+          <a:ln>
+            <a:solidFill>
+              <a:srgbClr val="FF0000"/>
+            </a:solidFill>
+          </a:ln>
+        </p:spPr>
+        <p:txBody>
+          <a:bodyPr wrap="square" rtlCol="0">
+            <a:spAutoFit/>
+          </a:bodyPr>
+          <a:lstStyle/>
+          <a:p>
+            <a:pPr algn="ctr"/>
+            <a:r>
+              <a:rPr lang="en-US" sz="1050" b="1"/>
+              <a:t>N5</a:t>
+            </a:r>
+          </a:p>
+        </p:txBody>
+      </p:sp>
+      <p:sp>
+        <p:nvSpPr>
+          <p:cNvPr id="9" name="TextBox 8">
+            <a:extLst>
+              <a:ext uri="{FF2B5EF4-FFF2-40B4-BE49-F238E27FC236}">
+                <a16:creationId xmlns:a16="http://schemas.microsoft.com/office/drawing/2014/main" id="{E54F72F7-1DEA-006E-F101-1D1027D937E7}"/>
+              </a:ext>
+            </a:extLst>
+          </p:cNvPr>
+          <p:cNvSpPr txBox="1"/>
+          <p:nvPr/>
+        </p:nvSpPr>
+        <p:spPr>
+          <a:xfrm>
+            <a:off x="7169654" y="4053321"/>
+            <a:ext cx="306539" cy="215444"/>
+          </a:xfrm>
+          <a:prstGeom prst="rect">
+            <a:avLst/>
+          </a:prstGeom>
+          <a:solidFill>
+            <a:schemeClr val="accent6">
+              <a:lumMod val="20000"/>
+              <a:lumOff val="80000"/>
+            </a:schemeClr>
+          </a:solidFill>
+          <a:ln>
+            <a:solidFill>
+              <a:srgbClr val="FF0000"/>
+            </a:solidFill>
+          </a:ln>
+        </p:spPr>
+        <p:txBody>
+          <a:bodyPr wrap="square" rtlCol="0">
+            <a:spAutoFit/>
+          </a:bodyPr>
+          <a:lstStyle/>
+          <a:p>
+            <a:pPr algn="ctr"/>
+            <a:r>
+              <a:rPr lang="en-US" sz="800" b="1"/>
+              <a:t>N6</a:t>
+            </a:r>
+          </a:p>
+        </p:txBody>
+      </p:sp>
+      <p:sp>
+        <p:nvSpPr>
+          <p:cNvPr id="10" name="TextBox 9">
+            <a:extLst>
+              <a:ext uri="{FF2B5EF4-FFF2-40B4-BE49-F238E27FC236}">
+                <a16:creationId xmlns:a16="http://schemas.microsoft.com/office/drawing/2014/main" id="{C82947CA-59CC-E117-2FA5-A0C0378A20BD}"/>
+              </a:ext>
+            </a:extLst>
+          </p:cNvPr>
+          <p:cNvSpPr txBox="1"/>
+          <p:nvPr/>
+        </p:nvSpPr>
+        <p:spPr>
+          <a:xfrm>
+            <a:off x="8950823" y="3504559"/>
+            <a:ext cx="3114507" cy="3046988"/>
+          </a:xfrm>
+          <a:prstGeom prst="rect">
+            <a:avLst/>
+          </a:prstGeom>
+          <a:solidFill>
+            <a:schemeClr val="accent4">
+              <a:lumMod val="20000"/>
+              <a:lumOff val="80000"/>
+            </a:schemeClr>
+          </a:solidFill>
+          <a:ln>
+            <a:solidFill>
+              <a:srgbClr val="FF0000"/>
+            </a:solidFill>
+          </a:ln>
+        </p:spPr>
+        <p:txBody>
+          <a:bodyPr wrap="square" rtlCol="0">
+            <a:spAutoFit/>
+          </a:bodyPr>
+          <a:lstStyle/>
+          <a:p>
+            <a:r>
+              <a:rPr lang="en-US" sz="1200">
+                <a:solidFill>
+                  <a:srgbClr val="00B0F0"/>
+                </a:solidFill>
+              </a:rPr>
+              <a:t>No No No No No No No No No No No No No No No No No No No No No No No No No No No No No No No No No No No No No No No No No No No No No No No No No No No No No No No No No No No No No No No No No No No No No No No No No No No No No No No No No No No No No No No No No No No No No No No No No No No No No No No No No No No No No No No No No No No No No No No No No No No No No No No No No No No No No No No No No No No No No No No No No No No No No No No No No No No No No No No No No No No No No No No No No No No No No No No No No No No No No No No No No No No No No No No No No No No No No No No No No No No No No No No</a:t>
+            </a:r>
+            <a:r>
+              <a:rPr lang="en-US" sz="1200" b="1"/>
+              <a:t> </a:t>
+            </a:r>
+            <a:r>
+              <a:rPr lang="en-US" sz="1200" b="1">
+                <a:solidFill>
+                  <a:srgbClr val="FF0000"/>
+                </a:solidFill>
+              </a:rPr>
+              <a:t>YES</a:t>
+            </a:r>
+          </a:p>
+        </p:txBody>
+      </p:sp>
+      <p:sp>
+        <p:nvSpPr>
+          <p:cNvPr id="11" name="TextBox 10">
+            <a:extLst>
+              <a:ext uri="{FF2B5EF4-FFF2-40B4-BE49-F238E27FC236}">
+                <a16:creationId xmlns:a16="http://schemas.microsoft.com/office/drawing/2014/main" id="{90808734-FDEC-E125-8C1C-057FE2A77C11}"/>
+              </a:ext>
+            </a:extLst>
+          </p:cNvPr>
+          <p:cNvSpPr txBox="1"/>
+          <p:nvPr/>
+        </p:nvSpPr>
+        <p:spPr>
+          <a:xfrm>
+            <a:off x="4882417" y="4598551"/>
+            <a:ext cx="1638924" cy="523220"/>
+          </a:xfrm>
+          <a:prstGeom prst="rect">
+            <a:avLst/>
+          </a:prstGeom>
+          <a:noFill/>
+        </p:spPr>
+        <p:txBody>
+          <a:bodyPr wrap="square" rtlCol="0">
+            <a:spAutoFit/>
+          </a:bodyPr>
+          <a:lstStyle/>
+          <a:p>
+            <a:r>
+              <a:rPr lang="en-US" sz="1400"/>
+              <a:t>You Job Search Marketing Funnel</a:t>
+            </a:r>
+          </a:p>
+        </p:txBody>
+      </p:sp>
+      <p:sp>
+        <p:nvSpPr>
+          <p:cNvPr id="12" name="Right Arrow 11">
+            <a:extLst>
+              <a:ext uri="{FF2B5EF4-FFF2-40B4-BE49-F238E27FC236}">
+                <a16:creationId xmlns:a16="http://schemas.microsoft.com/office/drawing/2014/main" id="{BEF6DB55-0358-F6E4-7B47-18FADF12B4B9}"/>
+              </a:ext>
+            </a:extLst>
+          </p:cNvPr>
+          <p:cNvSpPr/>
+          <p:nvPr/>
+        </p:nvSpPr>
+        <p:spPr>
+          <a:xfrm rot="19020802">
+            <a:off x="5400053" y="3889225"/>
+            <a:ext cx="985782" cy="249382"/>
+          </a:xfrm>
+          <a:prstGeom prst="rightArrow">
+            <a:avLst/>
+          </a:prstGeom>
+          <a:solidFill>
+            <a:srgbClr val="00B050"/>
+          </a:solidFill>
+          <a:ln>
+            <a:solidFill>
+              <a:srgbClr val="FF0000"/>
+            </a:solidFill>
+          </a:ln>
+        </p:spPr>
+        <p:style>
+          <a:lnRef idx="2">
+            <a:schemeClr val="accent1">
+              <a:shade val="50000"/>
+            </a:schemeClr>
+          </a:lnRef>
+          <a:fillRef idx="1">
+            <a:schemeClr val="accent1"/>
+          </a:fillRef>
+          <a:effectRef idx="0">
+            <a:schemeClr val="accent1"/>
+          </a:effectRef>
+          <a:fontRef idx="minor">
+            <a:schemeClr val="lt1"/>
+          </a:fontRef>
+        </p:style>
+        <p:txBody>
+          <a:bodyPr rtlCol="0" anchor="ctr"/>
+          <a:lstStyle/>
+          <a:p>
+            <a:pPr algn="ctr"/>
+            <a:endParaRPr lang="en-US"/>
           </a:p>
         </p:txBody>
       </p:sp>
@@ -4375,8 +4870,8 @@
         </p:nvSpPr>
         <p:spPr>
           <a:xfrm>
-            <a:off x="2317897" y="1244009"/>
-            <a:ext cx="6198782" cy="4401205"/>
+            <a:off x="356328" y="1007860"/>
+            <a:ext cx="6198782" cy="1600438"/>
           </a:xfrm>
           <a:prstGeom prst="rect">
             <a:avLst/>
@@ -4401,7 +4896,7 @@
           <a:p>
             <a:r>
               <a:rPr lang="en-US" sz="1400"/>
-              <a:t>To look for a job is a job in itself.</a:t>
+              <a:t>To look for a job is a profession in itself.</a:t>
             </a:r>
           </a:p>
           <a:p>
@@ -4418,83 +4913,29 @@
           </a:p>
           <a:p>
             <a:r>
-              <a:rPr lang="en-US" sz="1400"/>
+              <a:rPr lang="en-US" sz="1400" b="1">
+                <a:solidFill>
+                  <a:srgbClr val="FF0000"/>
+                </a:solidFill>
+              </a:rPr>
               <a:t>How many books have you read on the subject of looking for a job?</a:t>
             </a:r>
           </a:p>
           <a:p>
-            <a:r>
-              <a:rPr lang="en-US" sz="1400"/>
+            <a:endParaRPr lang="en-US" sz="1400" b="1">
+              <a:solidFill>
+                <a:srgbClr val="FF0000"/>
+              </a:solidFill>
+            </a:endParaRPr>
+          </a:p>
+          <a:p>
+            <a:r>
+              <a:rPr lang="en-US" sz="1400" b="1">
+                <a:solidFill>
+                  <a:srgbClr val="FF0000"/>
+                </a:solidFill>
+              </a:rPr>
               <a:t>Have you passed any exams/tests on the subject?</a:t>
-            </a:r>
-          </a:p>
-          <a:p>
-            <a:endParaRPr lang="en-US" sz="1400"/>
-          </a:p>
-          <a:p>
-            <a:r>
-              <a:rPr lang="en-US" sz="1400"/>
-              <a:t>Suppose you need to undergo a brain surgery.</a:t>
-            </a:r>
-          </a:p>
-          <a:p>
-            <a:r>
-              <a:rPr lang="en-US" sz="1400"/>
-              <a:t>And you find that your surgeon hasn't read even a single book about medicine.</a:t>
-            </a:r>
-          </a:p>
-          <a:p>
-            <a:r>
-              <a:rPr lang="en-US" sz="1400"/>
-              <a:t>Will you be willing to pay him to do a surgery on you?</a:t>
-            </a:r>
-          </a:p>
-          <a:p>
-            <a:endParaRPr lang="en-US" sz="1400"/>
-          </a:p>
-          <a:p>
-            <a:r>
-              <a:rPr lang="en-US" sz="1400"/>
-              <a:t>So how can you become successful in finding jobs</a:t>
-            </a:r>
-          </a:p>
-          <a:p>
-            <a:r>
-              <a:rPr lang="en-US" sz="1400"/>
-              <a:t>if you haven't educated yourself in how to do it?</a:t>
-            </a:r>
-          </a:p>
-          <a:p>
-            <a:endParaRPr lang="en-US" sz="1400"/>
-          </a:p>
-          <a:p>
-            <a:r>
-              <a:rPr lang="en-US" sz="1400"/>
-              <a:t>You don't need to be a superhero to find a job.</a:t>
-            </a:r>
-          </a:p>
-          <a:p>
-            <a:endParaRPr lang="en-US" sz="1400"/>
-          </a:p>
-          <a:p>
-            <a:r>
-              <a:rPr lang="en-US" sz="1400"/>
-              <a:t>All you need is to follow certain proven steps.</a:t>
-            </a:r>
-          </a:p>
-          <a:p>
-            <a:endParaRPr lang="en-US" sz="1400"/>
-          </a:p>
-          <a:p>
-            <a:r>
-              <a:rPr lang="en-US" sz="1400"/>
-              <a:t>You need to know what to do.</a:t>
-            </a:r>
-          </a:p>
-          <a:p>
-            <a:r>
-              <a:rPr lang="en-US" sz="1400"/>
-              <a:t>You need to learn it.</a:t>
             </a:r>
           </a:p>
         </p:txBody>
@@ -4530,6 +4971,284 @@
             <a:r>
               <a:rPr lang="en-US" sz="2800" b="1"/>
               <a:t>To look for a job is a Full-Time job in itself.</a:t>
+            </a:r>
+          </a:p>
+        </p:txBody>
+      </p:sp>
+      <p:pic>
+        <p:nvPicPr>
+          <p:cNvPr id="2050" name="Picture 2" descr="Barnes &amp; Noble banned books">
+            <a:extLst>
+              <a:ext uri="{FF2B5EF4-FFF2-40B4-BE49-F238E27FC236}">
+                <a16:creationId xmlns:a16="http://schemas.microsoft.com/office/drawing/2014/main" id="{94FF6E12-5708-4940-D928-247D2EB652D5}"/>
+              </a:ext>
+            </a:extLst>
+          </p:cNvPr>
+          <p:cNvPicPr>
+            <a:picLocks noChangeAspect="1" noChangeArrowheads="1"/>
+          </p:cNvPicPr>
+          <p:nvPr/>
+        </p:nvPicPr>
+        <p:blipFill>
+          <a:blip r:embed="rId2" cstate="email">
+            <a:extLst>
+              <a:ext uri="{28A0092B-C50C-407E-A947-70E740481C1C}">
+                <a14:useLocalDpi xmlns:a14="http://schemas.microsoft.com/office/drawing/2010/main"/>
+              </a:ext>
+            </a:extLst>
+          </a:blip>
+          <a:srcRect/>
+          <a:stretch>
+            <a:fillRect/>
+          </a:stretch>
+        </p:blipFill>
+        <p:spPr bwMode="auto">
+          <a:xfrm>
+            <a:off x="8162139" y="4323400"/>
+            <a:ext cx="2966192" cy="1668483"/>
+          </a:xfrm>
+          <a:prstGeom prst="rect">
+            <a:avLst/>
+          </a:prstGeom>
+          <a:noFill/>
+          <a:extLst>
+            <a:ext uri="{909E8E84-426E-40DD-AFC4-6F175D3DCCD1}">
+              <a14:hiddenFill xmlns:a14="http://schemas.microsoft.com/office/drawing/2010/main">
+                <a:solidFill>
+                  <a:srgbClr val="FFFFFF"/>
+                </a:solidFill>
+              </a14:hiddenFill>
+            </a:ext>
+          </a:extLst>
+        </p:spPr>
+      </p:pic>
+      <p:sp>
+        <p:nvSpPr>
+          <p:cNvPr id="4" name="TextBox 3">
+            <a:extLst>
+              <a:ext uri="{FF2B5EF4-FFF2-40B4-BE49-F238E27FC236}">
+                <a16:creationId xmlns:a16="http://schemas.microsoft.com/office/drawing/2014/main" id="{DEBB2EA1-3698-11AD-ED9E-ABA8292DC13C}"/>
+              </a:ext>
+            </a:extLst>
+          </p:cNvPr>
+          <p:cNvSpPr txBox="1"/>
+          <p:nvPr/>
+        </p:nvSpPr>
+        <p:spPr>
+          <a:xfrm>
+            <a:off x="356328" y="3068933"/>
+            <a:ext cx="6198782" cy="1384995"/>
+          </a:xfrm>
+          <a:prstGeom prst="rect">
+            <a:avLst/>
+          </a:prstGeom>
+          <a:solidFill>
+            <a:schemeClr val="accent4">
+              <a:lumMod val="20000"/>
+              <a:lumOff val="80000"/>
+            </a:schemeClr>
+          </a:solidFill>
+          <a:ln>
+            <a:solidFill>
+              <a:srgbClr val="FF0000"/>
+            </a:solidFill>
+          </a:ln>
+        </p:spPr>
+        <p:txBody>
+          <a:bodyPr wrap="square" rtlCol="0">
+            <a:spAutoFit/>
+          </a:bodyPr>
+          <a:lstStyle/>
+          <a:p>
+            <a:r>
+              <a:rPr lang="en-US" sz="1400"/>
+              <a:t>Suppose you need to undergo a brain surgery.</a:t>
+            </a:r>
+          </a:p>
+          <a:p>
+            <a:r>
+              <a:rPr lang="en-US" sz="1400"/>
+              <a:t>And you find that your surgeon hasn't read even a single book about medicine.</a:t>
+            </a:r>
+          </a:p>
+          <a:p>
+            <a:r>
+              <a:rPr lang="en-US" sz="1400"/>
+              <a:t>Will you be willing to pay him to do a surgery on you?</a:t>
+            </a:r>
+          </a:p>
+          <a:p>
+            <a:endParaRPr lang="en-US" sz="1400"/>
+          </a:p>
+          <a:p>
+            <a:r>
+              <a:rPr lang="en-US" sz="1400"/>
+              <a:t>So how can you become successful in finding jobs</a:t>
+            </a:r>
+          </a:p>
+          <a:p>
+            <a:r>
+              <a:rPr lang="en-US" sz="1400"/>
+              <a:t>if you haven't educated yourself in how to do it?</a:t>
+            </a:r>
+          </a:p>
+        </p:txBody>
+      </p:sp>
+      <p:sp>
+        <p:nvSpPr>
+          <p:cNvPr id="5" name="TextBox 4">
+            <a:extLst>
+              <a:ext uri="{FF2B5EF4-FFF2-40B4-BE49-F238E27FC236}">
+                <a16:creationId xmlns:a16="http://schemas.microsoft.com/office/drawing/2014/main" id="{72A93001-F204-3E2D-809A-443100676D80}"/>
+              </a:ext>
+            </a:extLst>
+          </p:cNvPr>
+          <p:cNvSpPr txBox="1"/>
+          <p:nvPr/>
+        </p:nvSpPr>
+        <p:spPr>
+          <a:xfrm>
+            <a:off x="2530069" y="5157642"/>
+            <a:ext cx="3917470" cy="1384995"/>
+          </a:xfrm>
+          <a:prstGeom prst="rect">
+            <a:avLst/>
+          </a:prstGeom>
+          <a:solidFill>
+            <a:schemeClr val="accent4">
+              <a:lumMod val="20000"/>
+              <a:lumOff val="80000"/>
+            </a:schemeClr>
+          </a:solidFill>
+          <a:ln>
+            <a:solidFill>
+              <a:srgbClr val="FF0000"/>
+            </a:solidFill>
+          </a:ln>
+        </p:spPr>
+        <p:txBody>
+          <a:bodyPr wrap="square" rtlCol="0">
+            <a:spAutoFit/>
+          </a:bodyPr>
+          <a:lstStyle/>
+          <a:p>
+            <a:r>
+              <a:rPr lang="en-US" sz="1400"/>
+              <a:t>You don't need to be a superhero to find a job.</a:t>
+            </a:r>
+          </a:p>
+          <a:p>
+            <a:endParaRPr lang="en-US" sz="1400"/>
+          </a:p>
+          <a:p>
+            <a:r>
+              <a:rPr lang="en-US" sz="1400" b="1">
+                <a:solidFill>
+                  <a:srgbClr val="FF0000"/>
+                </a:solidFill>
+              </a:rPr>
+              <a:t>All you need is to follow certain proven steps.</a:t>
+            </a:r>
+          </a:p>
+          <a:p>
+            <a:endParaRPr lang="en-US" sz="1400"/>
+          </a:p>
+          <a:p>
+            <a:r>
+              <a:rPr lang="en-US" sz="1400"/>
+              <a:t>You need to know what to do.</a:t>
+            </a:r>
+          </a:p>
+          <a:p>
+            <a:r>
+              <a:rPr lang="en-US" sz="1400"/>
+              <a:t>You need to learn it.</a:t>
+            </a:r>
+          </a:p>
+        </p:txBody>
+      </p:sp>
+      <p:pic>
+        <p:nvPicPr>
+          <p:cNvPr id="2052" name="Picture 4" descr="How to Become an Orthopedist">
+            <a:extLst>
+              <a:ext uri="{FF2B5EF4-FFF2-40B4-BE49-F238E27FC236}">
+                <a16:creationId xmlns:a16="http://schemas.microsoft.com/office/drawing/2014/main" id="{A084B7C2-1160-8B2D-A794-13384658D56F}"/>
+              </a:ext>
+            </a:extLst>
+          </p:cNvPr>
+          <p:cNvPicPr>
+            <a:picLocks noChangeAspect="1" noChangeArrowheads="1"/>
+          </p:cNvPicPr>
+          <p:nvPr/>
+        </p:nvPicPr>
+        <p:blipFill>
+          <a:blip r:embed="rId3" cstate="email">
+            <a:extLst>
+              <a:ext uri="{28A0092B-C50C-407E-A947-70E740481C1C}">
+                <a14:useLocalDpi xmlns:a14="http://schemas.microsoft.com/office/drawing/2010/main"/>
+              </a:ext>
+            </a:extLst>
+          </a:blip>
+          <a:srcRect/>
+          <a:stretch>
+            <a:fillRect/>
+          </a:stretch>
+        </p:blipFill>
+        <p:spPr bwMode="auto">
+          <a:xfrm>
+            <a:off x="8275120" y="1943280"/>
+            <a:ext cx="2502726" cy="1668484"/>
+          </a:xfrm>
+          <a:prstGeom prst="rect">
+            <a:avLst/>
+          </a:prstGeom>
+          <a:noFill/>
+          <a:extLst>
+            <a:ext uri="{909E8E84-426E-40DD-AFC4-6F175D3DCCD1}">
+              <a14:hiddenFill xmlns:a14="http://schemas.microsoft.com/office/drawing/2010/main">
+                <a:solidFill>
+                  <a:srgbClr val="FFFFFF"/>
+                </a:solidFill>
+              </a14:hiddenFill>
+            </a:ext>
+          </a:extLst>
+        </p:spPr>
+      </p:pic>
+      <p:sp>
+        <p:nvSpPr>
+          <p:cNvPr id="6" name="TextBox 5">
+            <a:extLst>
+              <a:ext uri="{FF2B5EF4-FFF2-40B4-BE49-F238E27FC236}">
+                <a16:creationId xmlns:a16="http://schemas.microsoft.com/office/drawing/2014/main" id="{7D7AC792-31EB-84C0-2408-43A171A7BC46}"/>
+              </a:ext>
+            </a:extLst>
+          </p:cNvPr>
+          <p:cNvSpPr txBox="1"/>
+          <p:nvPr/>
+        </p:nvSpPr>
+        <p:spPr>
+          <a:xfrm>
+            <a:off x="7688280" y="684694"/>
+            <a:ext cx="3913911" cy="646331"/>
+          </a:xfrm>
+          <a:prstGeom prst="rect">
+            <a:avLst/>
+          </a:prstGeom>
+          <a:noFill/>
+        </p:spPr>
+        <p:txBody>
+          <a:bodyPr wrap="square" rtlCol="0">
+            <a:spAutoFit/>
+          </a:bodyPr>
+          <a:lstStyle/>
+          <a:p>
+            <a:r>
+              <a:rPr lang="en-US" b="1">
+                <a:solidFill>
+                  <a:srgbClr val="FF0000"/>
+                </a:solidFill>
+              </a:rPr>
+              <a:t>Searching for "job search" on amazon books returns over 10,000 results</a:t>
             </a:r>
           </a:p>
         </p:txBody>
@@ -4578,8 +5297,8 @@
         </p:nvSpPr>
         <p:spPr>
           <a:xfrm>
-            <a:off x="2977116" y="1228397"/>
-            <a:ext cx="5954233" cy="4401205"/>
+            <a:off x="148855" y="845624"/>
+            <a:ext cx="4699591" cy="4955203"/>
           </a:xfrm>
           <a:prstGeom prst="rect">
             <a:avLst/>
@@ -4633,8 +5352,12 @@
           </a:p>
           <a:p>
             <a:r>
-              <a:rPr lang="en-US" sz="1400"/>
-              <a:t>Which methods are more effective?</a:t>
+              <a:rPr lang="en-US" sz="1400" b="1">
+                <a:solidFill>
+                  <a:srgbClr val="FF0000"/>
+                </a:solidFill>
+              </a:rPr>
+              <a:t>Which methods are more effective today ?</a:t>
             </a:r>
           </a:p>
           <a:p>
@@ -4648,7 +5371,11 @@
           </a:p>
           <a:p>
             <a:r>
-              <a:rPr lang="en-US" sz="1400"/>
+              <a:rPr lang="en-US" sz="1400" b="1">
+                <a:solidFill>
+                  <a:srgbClr val="FF0000"/>
+                </a:solidFill>
+              </a:rPr>
               <a:t>"What_Color_Is_Your_Parachute"</a:t>
             </a:r>
           </a:p>
@@ -4671,8 +5398,29 @@
           <a:p>
             <a:r>
               <a:rPr lang="en-US" sz="1400"/>
-              <a:t>"It has been in print since 1970 and has been revised annually since 1975, sometimes substantially."</a:t>
-            </a:r>
+              <a:t>"It has been in print </a:t>
+            </a:r>
+            <a:r>
+              <a:rPr lang="en-US" sz="1400" b="1">
+                <a:solidFill>
+                  <a:srgbClr val="FF0000"/>
+                </a:solidFill>
+              </a:rPr>
+              <a:t>since 1970</a:t>
+            </a:r>
+            <a:r>
+              <a:rPr lang="en-US" sz="1400"/>
+              <a:t> and has been revised annually since 1975, sometimes substantially."</a:t>
+            </a:r>
+          </a:p>
+          <a:p>
+            <a:r>
+              <a:rPr lang="en-US" sz="1400"/>
+              <a:t>.. https://www.facebook.com/richardnbolles</a:t>
+            </a:r>
+          </a:p>
+          <a:p>
+            <a:endParaRPr lang="en-US" sz="1400"/>
           </a:p>
           <a:p>
             <a:endParaRPr lang="en-US" sz="1400"/>
@@ -4751,6 +5499,172 @@
             <a:r>
               <a:rPr lang="en-US" sz="2800" b="1"/>
               <a:t>The technology of finding jobs changes</a:t>
+            </a:r>
+          </a:p>
+        </p:txBody>
+      </p:sp>
+      <p:pic>
+        <p:nvPicPr>
+          <p:cNvPr id="1026" name="Picture 2" descr="No photo description available.">
+            <a:extLst>
+              <a:ext uri="{FF2B5EF4-FFF2-40B4-BE49-F238E27FC236}">
+                <a16:creationId xmlns:a16="http://schemas.microsoft.com/office/drawing/2014/main" id="{6D62C0CD-F0E2-679D-B805-9669572A58B2}"/>
+              </a:ext>
+            </a:extLst>
+          </p:cNvPr>
+          <p:cNvPicPr>
+            <a:picLocks noChangeAspect="1" noChangeArrowheads="1"/>
+          </p:cNvPicPr>
+          <p:nvPr/>
+        </p:nvPicPr>
+        <p:blipFill>
+          <a:blip r:embed="rId5" cstate="email">
+            <a:extLst>
+              <a:ext uri="{28A0092B-C50C-407E-A947-70E740481C1C}">
+                <a14:useLocalDpi xmlns:a14="http://schemas.microsoft.com/office/drawing/2010/main"/>
+              </a:ext>
+            </a:extLst>
+          </a:blip>
+          <a:srcRect/>
+          <a:stretch>
+            <a:fillRect/>
+          </a:stretch>
+        </p:blipFill>
+        <p:spPr bwMode="auto">
+          <a:xfrm>
+            <a:off x="7697972" y="241890"/>
+            <a:ext cx="4249480" cy="3187110"/>
+          </a:xfrm>
+          <a:prstGeom prst="rect">
+            <a:avLst/>
+          </a:prstGeom>
+          <a:noFill/>
+          <a:extLst>
+            <a:ext uri="{909E8E84-426E-40DD-AFC4-6F175D3DCCD1}">
+              <a14:hiddenFill xmlns:a14="http://schemas.microsoft.com/office/drawing/2010/main">
+                <a:solidFill>
+                  <a:srgbClr val="FFFFFF"/>
+                </a:solidFill>
+              </a14:hiddenFill>
+            </a:ext>
+          </a:extLst>
+        </p:spPr>
+      </p:pic>
+      <p:pic>
+        <p:nvPicPr>
+          <p:cNvPr id="4" name="Picture 3">
+            <a:extLst>
+              <a:ext uri="{FF2B5EF4-FFF2-40B4-BE49-F238E27FC236}">
+                <a16:creationId xmlns:a16="http://schemas.microsoft.com/office/drawing/2014/main" id="{2882339B-5B49-265A-EFC6-06710028AA30}"/>
+              </a:ext>
+            </a:extLst>
+          </p:cNvPr>
+          <p:cNvPicPr>
+            <a:picLocks noChangeAspect="1"/>
+          </p:cNvPicPr>
+          <p:nvPr/>
+        </p:nvPicPr>
+        <p:blipFill>
+          <a:blip r:embed="rId6" cstate="email">
+            <a:extLst>
+              <a:ext uri="{28A0092B-C50C-407E-A947-70E740481C1C}">
+                <a14:useLocalDpi xmlns:a14="http://schemas.microsoft.com/office/drawing/2010/main"/>
+              </a:ext>
+            </a:extLst>
+          </a:blip>
+          <a:stretch>
+            <a:fillRect/>
+          </a:stretch>
+        </p:blipFill>
+        <p:spPr>
+          <a:xfrm>
+            <a:off x="5414709" y="845624"/>
+            <a:ext cx="1717000" cy="2583376"/>
+          </a:xfrm>
+          <a:prstGeom prst="rect">
+            <a:avLst/>
+          </a:prstGeom>
+        </p:spPr>
+      </p:pic>
+      <p:pic>
+        <p:nvPicPr>
+          <p:cNvPr id="1028" name="Picture 4" descr="Dean Jackson | Technology, Focus, and Marketing - I Love Marketing">
+            <a:extLst>
+              <a:ext uri="{FF2B5EF4-FFF2-40B4-BE49-F238E27FC236}">
+                <a16:creationId xmlns:a16="http://schemas.microsoft.com/office/drawing/2014/main" id="{69B2B696-3D83-CD30-1B8D-A97734A6F1CF}"/>
+              </a:ext>
+            </a:extLst>
+          </p:cNvPr>
+          <p:cNvPicPr>
+            <a:picLocks noChangeAspect="1" noChangeArrowheads="1"/>
+          </p:cNvPicPr>
+          <p:nvPr/>
+        </p:nvPicPr>
+        <p:blipFill>
+          <a:blip r:embed="rId7" cstate="email">
+            <a:extLst>
+              <a:ext uri="{28A0092B-C50C-407E-A947-70E740481C1C}">
+                <a14:useLocalDpi xmlns:a14="http://schemas.microsoft.com/office/drawing/2010/main"/>
+              </a:ext>
+            </a:extLst>
+          </a:blip>
+          <a:srcRect/>
+          <a:stretch>
+            <a:fillRect/>
+          </a:stretch>
+        </p:blipFill>
+        <p:spPr bwMode="auto">
+          <a:xfrm>
+            <a:off x="5043084" y="4605442"/>
+            <a:ext cx="3662031" cy="1997472"/>
+          </a:xfrm>
+          <a:prstGeom prst="rect">
+            <a:avLst/>
+          </a:prstGeom>
+          <a:noFill/>
+          <a:extLst>
+            <a:ext uri="{909E8E84-426E-40DD-AFC4-6F175D3DCCD1}">
+              <a14:hiddenFill xmlns:a14="http://schemas.microsoft.com/office/drawing/2010/main">
+                <a:solidFill>
+                  <a:srgbClr val="FFFFFF"/>
+                </a:solidFill>
+              </a14:hiddenFill>
+            </a:ext>
+          </a:extLst>
+        </p:spPr>
+      </p:pic>
+      <p:sp>
+        <p:nvSpPr>
+          <p:cNvPr id="5" name="TextBox 4">
+            <a:extLst>
+              <a:ext uri="{FF2B5EF4-FFF2-40B4-BE49-F238E27FC236}">
+                <a16:creationId xmlns:a16="http://schemas.microsoft.com/office/drawing/2014/main" id="{F2D7312A-6AE5-EA12-7AEC-8EB36E7CD68A}"/>
+              </a:ext>
+            </a:extLst>
+          </p:cNvPr>
+          <p:cNvSpPr txBox="1"/>
+          <p:nvPr/>
+        </p:nvSpPr>
+        <p:spPr>
+          <a:xfrm>
+            <a:off x="8782494" y="3463223"/>
+            <a:ext cx="1818168" cy="369332"/>
+          </a:xfrm>
+          <a:prstGeom prst="rect">
+            <a:avLst/>
+          </a:prstGeom>
+          <a:noFill/>
+        </p:spPr>
+        <p:txBody>
+          <a:bodyPr wrap="square" rtlCol="0">
+            <a:spAutoFit/>
+          </a:bodyPr>
+          <a:lstStyle/>
+          <a:p>
+            <a:pPr algn="ctr"/>
+            <a:r>
+              <a:rPr lang="en-US"/>
+              <a:t>1970 - present</a:t>
             </a:r>
           </a:p>
         </p:txBody>

--- a/Job_Searching.pptx
+++ b/Job_Searching.pptx
@@ -5,7 +5,7 @@
     <p:sldMasterId id="2147483648" r:id="rId1"/>
   </p:sldMasterIdLst>
   <p:notesMasterIdLst>
-    <p:notesMasterId r:id="rId18"/>
+    <p:notesMasterId r:id="rId20"/>
   </p:notesMasterIdLst>
   <p:sldIdLst>
     <p:sldId id="287" r:id="rId2"/>
@@ -23,7 +23,9 @@
     <p:sldId id="299" r:id="rId14"/>
     <p:sldId id="300" r:id="rId15"/>
     <p:sldId id="301" r:id="rId16"/>
-    <p:sldId id="302" r:id="rId17"/>
+    <p:sldId id="304" r:id="rId17"/>
+    <p:sldId id="302" r:id="rId18"/>
+    <p:sldId id="303" r:id="rId19"/>
   </p:sldIdLst>
   <p:sldSz cx="12192000" cy="6858000"/>
   <p:notesSz cx="6858000" cy="9144000"/>
@@ -211,7 +213,7 @@
           </a:lstStyle>
           <a:p>
             <a:fld id="{610AF671-4685-124D-A41D-446D235EA8CE}" type="datetimeFigureOut">
-              <a:t>9/19/22</a:t>
+              <a:t>9/21/22</a:t>
             </a:fld>
             <a:endParaRPr lang="en-US"/>
           </a:p>
@@ -624,7 +626,7 @@
           <a:p>
             <a:fld id="{2D90B581-06C6-5A4B-9E30-3EAD5667F4B3}" type="datetimeFigureOut">
               <a:rPr lang="en-US" smtClean="0"/>
-              <a:t>9/19/22</a:t>
+              <a:t>9/21/22</a:t>
             </a:fld>
             <a:endParaRPr lang="en-US"/>
           </a:p>
@@ -822,7 +824,7 @@
           <a:p>
             <a:fld id="{2D90B581-06C6-5A4B-9E30-3EAD5667F4B3}" type="datetimeFigureOut">
               <a:rPr lang="en-US" smtClean="0"/>
-              <a:t>9/19/22</a:t>
+              <a:t>9/21/22</a:t>
             </a:fld>
             <a:endParaRPr lang="en-US"/>
           </a:p>
@@ -1030,7 +1032,7 @@
           <a:p>
             <a:fld id="{2D90B581-06C6-5A4B-9E30-3EAD5667F4B3}" type="datetimeFigureOut">
               <a:rPr lang="en-US" smtClean="0"/>
-              <a:t>9/19/22</a:t>
+              <a:t>9/21/22</a:t>
             </a:fld>
             <a:endParaRPr lang="en-US"/>
           </a:p>
@@ -1228,7 +1230,7 @@
           <a:p>
             <a:fld id="{2D90B581-06C6-5A4B-9E30-3EAD5667F4B3}" type="datetimeFigureOut">
               <a:rPr lang="en-US" smtClean="0"/>
-              <a:t>9/19/22</a:t>
+              <a:t>9/21/22</a:t>
             </a:fld>
             <a:endParaRPr lang="en-US"/>
           </a:p>
@@ -1503,7 +1505,7 @@
           <a:p>
             <a:fld id="{2D90B581-06C6-5A4B-9E30-3EAD5667F4B3}" type="datetimeFigureOut">
               <a:rPr lang="en-US" smtClean="0"/>
-              <a:t>9/19/22</a:t>
+              <a:t>9/21/22</a:t>
             </a:fld>
             <a:endParaRPr lang="en-US"/>
           </a:p>
@@ -1768,7 +1770,7 @@
           <a:p>
             <a:fld id="{2D90B581-06C6-5A4B-9E30-3EAD5667F4B3}" type="datetimeFigureOut">
               <a:rPr lang="en-US" smtClean="0"/>
-              <a:t>9/19/22</a:t>
+              <a:t>9/21/22</a:t>
             </a:fld>
             <a:endParaRPr lang="en-US"/>
           </a:p>
@@ -2180,7 +2182,7 @@
           <a:p>
             <a:fld id="{2D90B581-06C6-5A4B-9E30-3EAD5667F4B3}" type="datetimeFigureOut">
               <a:rPr lang="en-US" smtClean="0"/>
-              <a:t>9/19/22</a:t>
+              <a:t>9/21/22</a:t>
             </a:fld>
             <a:endParaRPr lang="en-US"/>
           </a:p>
@@ -2321,7 +2323,7 @@
           <a:p>
             <a:fld id="{2D90B581-06C6-5A4B-9E30-3EAD5667F4B3}" type="datetimeFigureOut">
               <a:rPr lang="en-US" smtClean="0"/>
-              <a:t>9/19/22</a:t>
+              <a:t>9/21/22</a:t>
             </a:fld>
             <a:endParaRPr lang="en-US"/>
           </a:p>
@@ -2434,7 +2436,7 @@
           <a:p>
             <a:fld id="{2D90B581-06C6-5A4B-9E30-3EAD5667F4B3}" type="datetimeFigureOut">
               <a:rPr lang="en-US" smtClean="0"/>
-              <a:t>9/19/22</a:t>
+              <a:t>9/21/22</a:t>
             </a:fld>
             <a:endParaRPr lang="en-US"/>
           </a:p>
@@ -2745,7 +2747,7 @@
           <a:p>
             <a:fld id="{2D90B581-06C6-5A4B-9E30-3EAD5667F4B3}" type="datetimeFigureOut">
               <a:rPr lang="en-US" smtClean="0"/>
-              <a:t>9/19/22</a:t>
+              <a:t>9/21/22</a:t>
             </a:fld>
             <a:endParaRPr lang="en-US"/>
           </a:p>
@@ -3033,7 +3035,7 @@
           <a:p>
             <a:fld id="{2D90B581-06C6-5A4B-9E30-3EAD5667F4B3}" type="datetimeFigureOut">
               <a:rPr lang="en-US" smtClean="0"/>
-              <a:t>9/19/22</a:t>
+              <a:t>9/21/22</a:t>
             </a:fld>
             <a:endParaRPr lang="en-US"/>
           </a:p>
@@ -3274,7 +3276,7 @@
           <a:p>
             <a:fld id="{2D90B581-06C6-5A4B-9E30-3EAD5667F4B3}" type="datetimeFigureOut">
               <a:rPr lang="en-US" smtClean="0"/>
-              <a:t>9/19/22</a:t>
+              <a:t>9/21/22</a:t>
             </a:fld>
             <a:endParaRPr lang="en-US"/>
           </a:p>
@@ -3705,7 +3707,7 @@
         </p:nvSpPr>
         <p:spPr>
           <a:xfrm>
-            <a:off x="1272665" y="430793"/>
+            <a:off x="346330" y="452058"/>
             <a:ext cx="9646670" cy="707886"/>
           </a:xfrm>
           <a:prstGeom prst="rect">
@@ -3718,7 +3720,6 @@
           </a:bodyPr>
           <a:lstStyle/>
           <a:p>
-            <a:pPr algn="ctr"/>
             <a:r>
               <a:rPr lang="en-US" sz="4000" b="1" dirty="0">
                 <a:solidFill>
@@ -3745,8 +3746,8 @@
         </p:nvSpPr>
         <p:spPr>
           <a:xfrm>
-            <a:off x="2398414" y="1801780"/>
-            <a:ext cx="7395172" cy="3539430"/>
+            <a:off x="346330" y="1659285"/>
+            <a:ext cx="6649893" cy="3970318"/>
           </a:xfrm>
           <a:prstGeom prst="rect">
             <a:avLst/>
@@ -3792,7 +3793,14 @@
             </a:pPr>
             <a:r>
               <a:rPr lang="en-US" sz="1400"/>
-              <a:t>The technologies change fast. You need to learn new stuff to be marketable. You have to change, to adapt. To </a:t>
+              <a:t>The technologies change fast. You need to learn new stuff to be marketable. </a:t>
+            </a:r>
+            <a:br>
+              <a:rPr lang="en-US" sz="1400"/>
+            </a:br>
+            <a:r>
+              <a:rPr lang="en-US" sz="1400"/>
+              <a:t>You have to change, to adapt, to </a:t>
             </a:r>
             <a:r>
               <a:rPr lang="en-US" sz="1400" b="1">
@@ -3833,7 +3841,14 @@
             </a:r>
             <a:r>
               <a:rPr lang="en-US" sz="1400"/>
-              <a:t> to receive high rate/salary. New job types become commoditized (and salaries drop) in just few years.</a:t>
+              <a:t> to receive high rate/salary. </a:t>
+            </a:r>
+            <a:br>
+              <a:rPr lang="en-US" sz="1400"/>
+            </a:br>
+            <a:r>
+              <a:rPr lang="en-US" sz="1400"/>
+              <a:t>New job types become commoditized (and salaries drop) in just few years.</a:t>
             </a:r>
           </a:p>
           <a:p>
@@ -3850,7 +3865,57 @@
             </a:pPr>
             <a:r>
               <a:rPr lang="en-US" sz="1400"/>
-              <a:t>Most people don't educate themselves until they are forced to do so. So they are not increasing their salary. In fact, their effective compensation may go down, and competition increase.</a:t>
+              <a:t>Most people don't educate themselves until they are forced to do so. </a:t>
+            </a:r>
+            <a:br>
+              <a:rPr lang="en-US" sz="1400"/>
+            </a:br>
+            <a:r>
+              <a:rPr lang="en-US" sz="1400"/>
+              <a:t>So they are </a:t>
+            </a:r>
+            <a:r>
+              <a:rPr lang="en-US" sz="1400">
+                <a:solidFill>
+                  <a:srgbClr val="00B0F0"/>
+                </a:solidFill>
+              </a:rPr>
+              <a:t>not increasing their salary</a:t>
+            </a:r>
+            <a:r>
+              <a:rPr lang="en-US" sz="1400"/>
+              <a:t>. </a:t>
+            </a:r>
+            <a:br>
+              <a:rPr lang="en-US" sz="1400"/>
+            </a:br>
+            <a:r>
+              <a:rPr lang="en-US" sz="1400"/>
+              <a:t>In fact, their </a:t>
+            </a:r>
+            <a:r>
+              <a:rPr lang="en-US" sz="1400">
+                <a:solidFill>
+                  <a:srgbClr val="00B0F0"/>
+                </a:solidFill>
+              </a:rPr>
+              <a:t>effective compensation may go down</a:t>
+            </a:r>
+            <a:r>
+              <a:rPr lang="en-US" sz="1400"/>
+              <a:t>, and </a:t>
+            </a:r>
+            <a:r>
+              <a:rPr lang="en-US" sz="1400">
+                <a:solidFill>
+                  <a:srgbClr val="00B0F0"/>
+                </a:solidFill>
+              </a:rPr>
+              <a:t>competition get tougher</a:t>
+            </a:r>
+            <a:r>
+              <a:rPr lang="en-US" sz="1400"/>
+              <a:t>.</a:t>
             </a:r>
           </a:p>
           <a:p>
@@ -3867,7 +3932,26 @@
             </a:pPr>
             <a:r>
               <a:rPr lang="en-US" sz="1400"/>
-              <a:t>Nowadays you have to compete also against remote outsorcing to other countries and against outsourcing to computers (automation, cloud, AI)</a:t>
+              <a:t>Nowadays you have to also </a:t>
+            </a:r>
+            <a:r>
+              <a:rPr lang="en-US" sz="1400">
+                <a:solidFill>
+                  <a:srgbClr val="00B0F0"/>
+                </a:solidFill>
+              </a:rPr>
+              <a:t>compete against remote outsorcing</a:t>
+            </a:r>
+            <a:r>
+              <a:rPr lang="en-US" sz="1400"/>
+              <a:t> to other countries </a:t>
+            </a:r>
+            <a:br>
+              <a:rPr lang="en-US" sz="1400"/>
+            </a:br>
+            <a:r>
+              <a:rPr lang="en-US" sz="1400"/>
+              <a:t>and against outsourcing to computers (automation, cloud, AI)</a:t>
             </a:r>
           </a:p>
           <a:p>
@@ -3883,9 +3967,206 @@
               <a:buChar char="•"/>
             </a:pPr>
             <a:r>
-              <a:rPr lang="en-US" sz="1400"/>
-              <a:t>Many jobs are becoming extinct (for example, the number of human traders at financial companies has fallen down to about 1% of what it used to be).</a:t>
-            </a:r>
+              <a:rPr lang="en-US" sz="1400">
+                <a:solidFill>
+                  <a:srgbClr val="00B0F0"/>
+                </a:solidFill>
+              </a:rPr>
+              <a:t>Many jobs are becoming extinct</a:t>
+            </a:r>
+            <a:r>
+              <a:rPr lang="en-US" sz="1400"/>
+              <a:t> </a:t>
+            </a:r>
+            <a:br>
+              <a:rPr lang="en-US" sz="1400"/>
+            </a:br>
+            <a:r>
+              <a:rPr lang="en-US" sz="1400"/>
+              <a:t>(for example, the number of human traders at financial companies </a:t>
+            </a:r>
+            <a:br>
+              <a:rPr lang="en-US" sz="1400"/>
+            </a:br>
+            <a:r>
+              <a:rPr lang="en-US" sz="1400"/>
+              <a:t>has fallen down to about 1% of what it used to be).</a:t>
+            </a:r>
+          </a:p>
+        </p:txBody>
+      </p:sp>
+      <p:pic>
+        <p:nvPicPr>
+          <p:cNvPr id="3" name="Picture 2">
+            <a:extLst>
+              <a:ext uri="{FF2B5EF4-FFF2-40B4-BE49-F238E27FC236}">
+                <a16:creationId xmlns:a16="http://schemas.microsoft.com/office/drawing/2014/main" id="{053C5AF0-A463-7E5F-3456-1EFC47D529A3}"/>
+              </a:ext>
+            </a:extLst>
+          </p:cNvPr>
+          <p:cNvPicPr>
+            <a:picLocks noChangeAspect="1"/>
+          </p:cNvPicPr>
+          <p:nvPr/>
+        </p:nvPicPr>
+        <p:blipFill>
+          <a:blip r:embed="rId2" cstate="email">
+            <a:extLst>
+              <a:ext uri="{28A0092B-C50C-407E-A947-70E740481C1C}">
+                <a14:useLocalDpi xmlns:a14="http://schemas.microsoft.com/office/drawing/2010/main"/>
+              </a:ext>
+            </a:extLst>
+          </a:blip>
+          <a:stretch>
+            <a:fillRect/>
+          </a:stretch>
+        </p:blipFill>
+        <p:spPr>
+          <a:xfrm>
+            <a:off x="8884576" y="3272201"/>
+            <a:ext cx="2336800" cy="2019300"/>
+          </a:xfrm>
+          <a:prstGeom prst="rect">
+            <a:avLst/>
+          </a:prstGeom>
+        </p:spPr>
+      </p:pic>
+      <p:sp>
+        <p:nvSpPr>
+          <p:cNvPr id="5" name="Right Arrow 4">
+            <a:extLst>
+              <a:ext uri="{FF2B5EF4-FFF2-40B4-BE49-F238E27FC236}">
+                <a16:creationId xmlns:a16="http://schemas.microsoft.com/office/drawing/2014/main" id="{462E0DBE-8277-ED94-9B77-E40D480506DF}"/>
+              </a:ext>
+            </a:extLst>
+          </p:cNvPr>
+          <p:cNvSpPr/>
+          <p:nvPr/>
+        </p:nvSpPr>
+        <p:spPr>
+          <a:xfrm rot="11348181">
+            <a:off x="6318096" y="3359894"/>
+            <a:ext cx="2345020" cy="153906"/>
+          </a:xfrm>
+          <a:prstGeom prst="rightArrow">
+            <a:avLst/>
+          </a:prstGeom>
+        </p:spPr>
+        <p:style>
+          <a:lnRef idx="2">
+            <a:schemeClr val="accent1">
+              <a:shade val="50000"/>
+            </a:schemeClr>
+          </a:lnRef>
+          <a:fillRef idx="1">
+            <a:schemeClr val="accent1"/>
+          </a:fillRef>
+          <a:effectRef idx="0">
+            <a:schemeClr val="accent1"/>
+          </a:effectRef>
+          <a:fontRef idx="minor">
+            <a:schemeClr val="lt1"/>
+          </a:fontRef>
+        </p:style>
+        <p:txBody>
+          <a:bodyPr rtlCol="0" anchor="ctr"/>
+          <a:lstStyle/>
+          <a:p>
+            <a:pPr algn="ctr"/>
+            <a:endParaRPr lang="en-US"/>
+          </a:p>
+        </p:txBody>
+      </p:sp>
+      <p:pic>
+        <p:nvPicPr>
+          <p:cNvPr id="1028" name="Picture 4" descr="Educate yourself Stock Photos, Royalty Free Educate yourself Images |  Depositphotos">
+            <a:extLst>
+              <a:ext uri="{FF2B5EF4-FFF2-40B4-BE49-F238E27FC236}">
+                <a16:creationId xmlns:a16="http://schemas.microsoft.com/office/drawing/2014/main" id="{6ECF677D-ADF6-5551-6D49-76AC11EE35D8}"/>
+              </a:ext>
+            </a:extLst>
+          </p:cNvPr>
+          <p:cNvPicPr>
+            <a:picLocks noChangeAspect="1" noChangeArrowheads="1"/>
+          </p:cNvPicPr>
+          <p:nvPr/>
+        </p:nvPicPr>
+        <p:blipFill>
+          <a:blip r:embed="rId3" cstate="email">
+            <a:extLst>
+              <a:ext uri="{28A0092B-C50C-407E-A947-70E740481C1C}">
+                <a14:useLocalDpi xmlns:a14="http://schemas.microsoft.com/office/drawing/2010/main"/>
+              </a:ext>
+            </a:extLst>
+          </a:blip>
+          <a:srcRect/>
+          <a:stretch>
+            <a:fillRect/>
+          </a:stretch>
+        </p:blipFill>
+        <p:spPr bwMode="auto">
+          <a:xfrm>
+            <a:off x="8881667" y="1659285"/>
+            <a:ext cx="2339709" cy="1314137"/>
+          </a:xfrm>
+          <a:prstGeom prst="rect">
+            <a:avLst/>
+          </a:prstGeom>
+          <a:noFill/>
+          <a:extLst>
+            <a:ext uri="{909E8E84-426E-40DD-AFC4-6F175D3DCCD1}">
+              <a14:hiddenFill xmlns:a14="http://schemas.microsoft.com/office/drawing/2010/main">
+                <a:solidFill>
+                  <a:srgbClr val="FFFFFF"/>
+                </a:solidFill>
+              </a14:hiddenFill>
+            </a:ext>
+          </a:extLst>
+        </p:spPr>
+      </p:pic>
+      <p:sp>
+        <p:nvSpPr>
+          <p:cNvPr id="6" name="Right Arrow 5">
+            <a:extLst>
+              <a:ext uri="{FF2B5EF4-FFF2-40B4-BE49-F238E27FC236}">
+                <a16:creationId xmlns:a16="http://schemas.microsoft.com/office/drawing/2014/main" id="{6D951FDE-3866-B5FC-CF40-B8A2518FCC1A}"/>
+              </a:ext>
+            </a:extLst>
+          </p:cNvPr>
+          <p:cNvSpPr/>
+          <p:nvPr/>
+        </p:nvSpPr>
+        <p:spPr>
+          <a:xfrm rot="10549212">
+            <a:off x="6323242" y="2289241"/>
+            <a:ext cx="2345020" cy="153906"/>
+          </a:xfrm>
+          <a:prstGeom prst="rightArrow">
+            <a:avLst/>
+          </a:prstGeom>
+        </p:spPr>
+        <p:style>
+          <a:lnRef idx="2">
+            <a:schemeClr val="accent1">
+              <a:shade val="50000"/>
+            </a:schemeClr>
+          </a:lnRef>
+          <a:fillRef idx="1">
+            <a:schemeClr val="accent1"/>
+          </a:fillRef>
+          <a:effectRef idx="0">
+            <a:schemeClr val="accent1"/>
+          </a:effectRef>
+          <a:fontRef idx="minor">
+            <a:schemeClr val="lt1"/>
+          </a:fontRef>
+        </p:style>
+        <p:txBody>
+          <a:bodyPr rtlCol="0" anchor="ctr"/>
+          <a:lstStyle/>
+          <a:p>
+            <a:pPr algn="ctr"/>
+            <a:endParaRPr lang="en-US"/>
           </a:p>
         </p:txBody>
       </p:sp>
@@ -3933,7 +4214,7 @@
         </p:nvSpPr>
         <p:spPr>
           <a:xfrm>
-            <a:off x="3162795" y="1472715"/>
+            <a:off x="881963" y="1610939"/>
             <a:ext cx="5677786" cy="5047536"/>
           </a:xfrm>
           <a:prstGeom prst="rect">
@@ -4149,6 +4430,194 @@
           </a:p>
         </p:txBody>
       </p:sp>
+      <p:pic>
+        <p:nvPicPr>
+          <p:cNvPr id="6146" name="Picture 2" descr="Amazon.com: How to Position Yourself As The Obvious Expert®: Turbocharge  Your Consulting or Coaching Business Now!: 9780972094160: Elsom Eldridge  Jr., Mark L. Eldridge: Books">
+            <a:extLst>
+              <a:ext uri="{FF2B5EF4-FFF2-40B4-BE49-F238E27FC236}">
+                <a16:creationId xmlns:a16="http://schemas.microsoft.com/office/drawing/2014/main" id="{C4AF6971-B550-F3B8-DCDE-DBC8B96E5995}"/>
+              </a:ext>
+            </a:extLst>
+          </p:cNvPr>
+          <p:cNvPicPr>
+            <a:picLocks noChangeAspect="1" noChangeArrowheads="1"/>
+          </p:cNvPicPr>
+          <p:nvPr/>
+        </p:nvPicPr>
+        <p:blipFill>
+          <a:blip r:embed="rId2" cstate="email">
+            <a:extLst>
+              <a:ext uri="{28A0092B-C50C-407E-A947-70E740481C1C}">
+                <a14:useLocalDpi xmlns:a14="http://schemas.microsoft.com/office/drawing/2010/main"/>
+              </a:ext>
+            </a:extLst>
+          </a:blip>
+          <a:srcRect/>
+          <a:stretch>
+            <a:fillRect/>
+          </a:stretch>
+        </p:blipFill>
+        <p:spPr bwMode="auto">
+          <a:xfrm>
+            <a:off x="9087537" y="1060985"/>
+            <a:ext cx="2222500" cy="3168650"/>
+          </a:xfrm>
+          <a:prstGeom prst="rect">
+            <a:avLst/>
+          </a:prstGeom>
+          <a:noFill/>
+          <a:extLst>
+            <a:ext uri="{909E8E84-426E-40DD-AFC4-6F175D3DCCD1}">
+              <a14:hiddenFill xmlns:a14="http://schemas.microsoft.com/office/drawing/2010/main">
+                <a:solidFill>
+                  <a:srgbClr val="FFFFFF"/>
+                </a:solidFill>
+              </a14:hiddenFill>
+            </a:ext>
+          </a:extLst>
+        </p:spPr>
+      </p:pic>
+      <p:pic>
+        <p:nvPicPr>
+          <p:cNvPr id="6148" name="Picture 4" descr="New Features to Get the Most From Posting on LinkedIn | Official LinkedIn  Blog">
+            <a:extLst>
+              <a:ext uri="{FF2B5EF4-FFF2-40B4-BE49-F238E27FC236}">
+                <a16:creationId xmlns:a16="http://schemas.microsoft.com/office/drawing/2014/main" id="{4C6F9D95-9705-5CB8-BC95-0768F857FB90}"/>
+              </a:ext>
+            </a:extLst>
+          </p:cNvPr>
+          <p:cNvPicPr>
+            <a:picLocks noChangeAspect="1" noChangeArrowheads="1"/>
+          </p:cNvPicPr>
+          <p:nvPr/>
+        </p:nvPicPr>
+        <p:blipFill>
+          <a:blip r:embed="rId3" cstate="email">
+            <a:extLst>
+              <a:ext uri="{28A0092B-C50C-407E-A947-70E740481C1C}">
+                <a14:useLocalDpi xmlns:a14="http://schemas.microsoft.com/office/drawing/2010/main"/>
+              </a:ext>
+            </a:extLst>
+          </a:blip>
+          <a:srcRect/>
+          <a:stretch>
+            <a:fillRect/>
+          </a:stretch>
+        </p:blipFill>
+        <p:spPr bwMode="auto">
+          <a:xfrm>
+            <a:off x="7066928" y="2987749"/>
+            <a:ext cx="1366261" cy="769725"/>
+          </a:xfrm>
+          <a:prstGeom prst="rect">
+            <a:avLst/>
+          </a:prstGeom>
+          <a:noFill/>
+          <a:extLst>
+            <a:ext uri="{909E8E84-426E-40DD-AFC4-6F175D3DCCD1}">
+              <a14:hiddenFill xmlns:a14="http://schemas.microsoft.com/office/drawing/2010/main">
+                <a:solidFill>
+                  <a:srgbClr val="FFFFFF"/>
+                </a:solidFill>
+              </a14:hiddenFill>
+            </a:ext>
+          </a:extLst>
+        </p:spPr>
+      </p:pic>
+      <p:pic>
+        <p:nvPicPr>
+          <p:cNvPr id="6150" name="Picture 6" descr="YouTube rolls out a new update that enables users to see pop-up previews of  videos on the home feed / Digital Information World">
+            <a:extLst>
+              <a:ext uri="{FF2B5EF4-FFF2-40B4-BE49-F238E27FC236}">
+                <a16:creationId xmlns:a16="http://schemas.microsoft.com/office/drawing/2014/main" id="{C8A78328-25FA-56E2-5463-B706C767A791}"/>
+              </a:ext>
+            </a:extLst>
+          </p:cNvPr>
+          <p:cNvPicPr>
+            <a:picLocks noChangeAspect="1" noChangeArrowheads="1"/>
+          </p:cNvPicPr>
+          <p:nvPr/>
+        </p:nvPicPr>
+        <p:blipFill>
+          <a:blip r:embed="rId4" cstate="email">
+            <a:extLst>
+              <a:ext uri="{28A0092B-C50C-407E-A947-70E740481C1C}">
+                <a14:useLocalDpi xmlns:a14="http://schemas.microsoft.com/office/drawing/2010/main"/>
+              </a:ext>
+            </a:extLst>
+          </a:blip>
+          <a:srcRect/>
+          <a:stretch>
+            <a:fillRect/>
+          </a:stretch>
+        </p:blipFill>
+        <p:spPr bwMode="auto">
+          <a:xfrm>
+            <a:off x="7066929" y="3955311"/>
+            <a:ext cx="1425943" cy="903767"/>
+          </a:xfrm>
+          <a:prstGeom prst="rect">
+            <a:avLst/>
+          </a:prstGeom>
+          <a:noFill/>
+          <a:extLst>
+            <a:ext uri="{909E8E84-426E-40DD-AFC4-6F175D3DCCD1}">
+              <a14:hiddenFill xmlns:a14="http://schemas.microsoft.com/office/drawing/2010/main">
+                <a:solidFill>
+                  <a:srgbClr val="FFFFFF"/>
+                </a:solidFill>
+              </a14:hiddenFill>
+            </a:ext>
+          </a:extLst>
+        </p:spPr>
+      </p:pic>
+      <p:pic>
+        <p:nvPicPr>
+          <p:cNvPr id="6152" name="Picture 8" descr="All you could do with GitHub - OpenExpo Europe 2021 - Virtual Experience">
+            <a:extLst>
+              <a:ext uri="{FF2B5EF4-FFF2-40B4-BE49-F238E27FC236}">
+                <a16:creationId xmlns:a16="http://schemas.microsoft.com/office/drawing/2014/main" id="{ED90CAEB-AC57-C2BD-F36A-1903EC2D054B}"/>
+              </a:ext>
+            </a:extLst>
+          </p:cNvPr>
+          <p:cNvPicPr>
+            <a:picLocks noChangeAspect="1" noChangeArrowheads="1"/>
+          </p:cNvPicPr>
+          <p:nvPr/>
+        </p:nvPicPr>
+        <p:blipFill>
+          <a:blip r:embed="rId5" cstate="email">
+            <a:extLst>
+              <a:ext uri="{28A0092B-C50C-407E-A947-70E740481C1C}">
+                <a14:useLocalDpi xmlns:a14="http://schemas.microsoft.com/office/drawing/2010/main"/>
+              </a:ext>
+            </a:extLst>
+          </a:blip>
+          <a:srcRect/>
+          <a:stretch>
+            <a:fillRect/>
+          </a:stretch>
+        </p:blipFill>
+        <p:spPr bwMode="auto">
+          <a:xfrm>
+            <a:off x="7066928" y="5056915"/>
+            <a:ext cx="1395523" cy="926627"/>
+          </a:xfrm>
+          <a:prstGeom prst="rect">
+            <a:avLst/>
+          </a:prstGeom>
+          <a:noFill/>
+          <a:extLst>
+            <a:ext uri="{909E8E84-426E-40DD-AFC4-6F175D3DCCD1}">
+              <a14:hiddenFill xmlns:a14="http://schemas.microsoft.com/office/drawing/2010/main">
+                <a:solidFill>
+                  <a:srgbClr val="FFFFFF"/>
+                </a:solidFill>
+              </a14:hiddenFill>
+            </a:ext>
+          </a:extLst>
+        </p:spPr>
+      </p:pic>
     </p:spTree>
     <p:extLst>
       <p:ext uri="{BB962C8B-B14F-4D97-AF65-F5344CB8AC3E}">
@@ -5713,8 +6182,8 @@
         </p:nvSpPr>
         <p:spPr>
           <a:xfrm>
-            <a:off x="2646541" y="2164346"/>
-            <a:ext cx="6198782" cy="2031325"/>
+            <a:off x="211686" y="856541"/>
+            <a:ext cx="6533498" cy="2031325"/>
           </a:xfrm>
           <a:prstGeom prst="rect">
             <a:avLst/>
@@ -5767,9 +6236,6 @@
             </a:r>
           </a:p>
           <a:p>
-            <a:endParaRPr lang="en-US" sz="1400"/>
-          </a:p>
-          <a:p>
             <a:pPr marL="285750" indent="-285750">
               <a:buFont typeface="Arial" panose="020B0604020202020204" pitchFamily="34" charset="0"/>
               <a:buChar char="•"/>
@@ -5803,6 +6269,20 @@
               <a:t>. This is your positionning.</a:t>
             </a:r>
           </a:p>
+          <a:p>
+            <a:pPr marL="285750" indent="-285750">
+              <a:buFont typeface="Arial" panose="020B0604020202020204" pitchFamily="34" charset="0"/>
+              <a:buChar char="•"/>
+            </a:pPr>
+            <a:r>
+              <a:rPr lang="en-US" sz="1400" b="1">
+                <a:solidFill>
+                  <a:srgbClr val="FF0000"/>
+                </a:solidFill>
+              </a:rPr>
+              <a:t>Fill them with keywords on which you want people to find you when doing search</a:t>
+            </a:r>
+          </a:p>
         </p:txBody>
       </p:sp>
       <p:sp>
@@ -5840,6 +6320,114 @@
           </a:p>
         </p:txBody>
       </p:sp>
+      <p:pic>
+        <p:nvPicPr>
+          <p:cNvPr id="4" name="Picture 3">
+            <a:extLst>
+              <a:ext uri="{FF2B5EF4-FFF2-40B4-BE49-F238E27FC236}">
+                <a16:creationId xmlns:a16="http://schemas.microsoft.com/office/drawing/2014/main" id="{C3D43710-BEE5-5A5D-F98E-E17F84DA6E1E}"/>
+              </a:ext>
+            </a:extLst>
+          </p:cNvPr>
+          <p:cNvPicPr>
+            <a:picLocks noChangeAspect="1"/>
+          </p:cNvPicPr>
+          <p:nvPr/>
+        </p:nvPicPr>
+        <p:blipFill>
+          <a:blip r:embed="rId2" cstate="email">
+            <a:extLst>
+              <a:ext uri="{28A0092B-C50C-407E-A947-70E740481C1C}">
+                <a14:useLocalDpi xmlns:a14="http://schemas.microsoft.com/office/drawing/2010/main"/>
+              </a:ext>
+            </a:extLst>
+          </a:blip>
+          <a:stretch>
+            <a:fillRect/>
+          </a:stretch>
+        </p:blipFill>
+        <p:spPr>
+          <a:xfrm>
+            <a:off x="9005484" y="969788"/>
+            <a:ext cx="1986001" cy="5061098"/>
+          </a:xfrm>
+          <a:prstGeom prst="rect">
+            <a:avLst/>
+          </a:prstGeom>
+        </p:spPr>
+      </p:pic>
+      <p:sp>
+        <p:nvSpPr>
+          <p:cNvPr id="5" name="TextBox 4">
+            <a:extLst>
+              <a:ext uri="{FF2B5EF4-FFF2-40B4-BE49-F238E27FC236}">
+                <a16:creationId xmlns:a16="http://schemas.microsoft.com/office/drawing/2014/main" id="{855DF8CF-05A9-1E38-58CF-9467852ABE05}"/>
+              </a:ext>
+            </a:extLst>
+          </p:cNvPr>
+          <p:cNvSpPr txBox="1"/>
+          <p:nvPr/>
+        </p:nvSpPr>
+        <p:spPr>
+          <a:xfrm>
+            <a:off x="9419009" y="662011"/>
+            <a:ext cx="1158949" cy="307777"/>
+          </a:xfrm>
+          <a:prstGeom prst="rect">
+            <a:avLst/>
+          </a:prstGeom>
+          <a:noFill/>
+        </p:spPr>
+        <p:txBody>
+          <a:bodyPr wrap="square" rtlCol="0">
+            <a:spAutoFit/>
+          </a:bodyPr>
+          <a:lstStyle/>
+          <a:p>
+            <a:pPr algn="ctr"/>
+            <a:r>
+              <a:rPr lang="en-US" sz="1400"/>
+              <a:t>resume</a:t>
+            </a:r>
+          </a:p>
+        </p:txBody>
+      </p:sp>
+      <p:pic>
+        <p:nvPicPr>
+          <p:cNvPr id="6" name="Picture 5">
+            <a:extLst>
+              <a:ext uri="{FF2B5EF4-FFF2-40B4-BE49-F238E27FC236}">
+                <a16:creationId xmlns:a16="http://schemas.microsoft.com/office/drawing/2014/main" id="{8BDE32C7-0962-52ED-AA73-B43840F0F3E6}"/>
+              </a:ext>
+            </a:extLst>
+          </p:cNvPr>
+          <p:cNvPicPr>
+            <a:picLocks noChangeAspect="1"/>
+          </p:cNvPicPr>
+          <p:nvPr/>
+        </p:nvPicPr>
+        <p:blipFill>
+          <a:blip r:embed="rId3" cstate="email">
+            <a:extLst>
+              <a:ext uri="{28A0092B-C50C-407E-A947-70E740481C1C}">
+                <a14:useLocalDpi xmlns:a14="http://schemas.microsoft.com/office/drawing/2010/main"/>
+              </a:ext>
+            </a:extLst>
+          </a:blip>
+          <a:stretch>
+            <a:fillRect/>
+          </a:stretch>
+        </p:blipFill>
+        <p:spPr>
+          <a:xfrm>
+            <a:off x="3186517" y="3221187"/>
+            <a:ext cx="4405956" cy="3260064"/>
+          </a:xfrm>
+          <a:prstGeom prst="rect">
+            <a:avLst/>
+          </a:prstGeom>
+        </p:spPr>
+      </p:pic>
     </p:spTree>
     <p:extLst>
       <p:ext uri="{BB962C8B-B14F-4D97-AF65-F5344CB8AC3E}">
@@ -6150,6 +6738,81 @@
           </a:p>
         </p:txBody>
       </p:sp>
+      <p:sp>
+        <p:nvSpPr>
+          <p:cNvPr id="5" name="TextBox 4">
+            <a:extLst>
+              <a:ext uri="{FF2B5EF4-FFF2-40B4-BE49-F238E27FC236}">
+                <a16:creationId xmlns:a16="http://schemas.microsoft.com/office/drawing/2014/main" id="{3814E373-2AA0-5563-842A-60C29BD7008B}"/>
+              </a:ext>
+            </a:extLst>
+          </p:cNvPr>
+          <p:cNvSpPr txBox="1"/>
+          <p:nvPr/>
+        </p:nvSpPr>
+        <p:spPr>
+          <a:xfrm>
+            <a:off x="596344" y="3434316"/>
+            <a:ext cx="4851852" cy="1508105"/>
+          </a:xfrm>
+          <a:prstGeom prst="rect">
+            <a:avLst/>
+          </a:prstGeom>
+          <a:solidFill>
+            <a:schemeClr val="accent4">
+              <a:lumMod val="20000"/>
+              <a:lumOff val="80000"/>
+            </a:schemeClr>
+          </a:solidFill>
+          <a:ln>
+            <a:solidFill>
+              <a:srgbClr val="FF0000"/>
+            </a:solidFill>
+          </a:ln>
+        </p:spPr>
+        <p:txBody>
+          <a:bodyPr wrap="square" rtlCol="0">
+            <a:spAutoFit/>
+          </a:bodyPr>
+          <a:lstStyle/>
+          <a:p>
+            <a:r>
+              <a:rPr lang="en-US"/>
+              <a:t>My current title on Linkedin:</a:t>
+            </a:r>
+          </a:p>
+          <a:p>
+            <a:endParaRPr lang="en-US"/>
+          </a:p>
+          <a:p>
+            <a:r>
+              <a:rPr lang="en-US" sz="1400">
+                <a:solidFill>
+                  <a:srgbClr val="0070C0"/>
+                </a:solidFill>
+              </a:rPr>
+              <a:t>Lev Selector, Ph.D.</a:t>
+            </a:r>
+          </a:p>
+          <a:p>
+            <a:endParaRPr lang="en-US" sz="1400">
+              <a:solidFill>
+                <a:srgbClr val="0070C0"/>
+              </a:solidFill>
+            </a:endParaRPr>
+          </a:p>
+          <a:p>
+            <a:r>
+              <a:rPr lang="en-US" sz="1400">
+                <a:solidFill>
+                  <a:srgbClr val="0070C0"/>
+                </a:solidFill>
+              </a:rPr>
+              <a:t>Data Science | Machine Learning | Artificial Intelligence | Analytics | Expert | Leadership | Team Builder | Manager</a:t>
+            </a:r>
+          </a:p>
+        </p:txBody>
+      </p:sp>
     </p:spTree>
     <p:extLst>
       <p:ext uri="{BB962C8B-B14F-4D97-AF65-F5344CB8AC3E}">
@@ -6185,7 +6848,7 @@
           <p:cNvPr id="2" name="TextBox 1">
             <a:extLst>
               <a:ext uri="{FF2B5EF4-FFF2-40B4-BE49-F238E27FC236}">
-                <a16:creationId xmlns:a16="http://schemas.microsoft.com/office/drawing/2014/main" id="{D7ADE524-95E1-8CAC-0C99-A86AE43EEBFD}"/>
+                <a16:creationId xmlns:a16="http://schemas.microsoft.com/office/drawing/2014/main" id="{92088053-8EC1-D93F-761A-26C458DF4364}"/>
               </a:ext>
             </a:extLst>
           </p:cNvPr>
@@ -6194,8 +6857,8 @@
         </p:nvSpPr>
         <p:spPr>
           <a:xfrm>
-            <a:off x="3502117" y="1841090"/>
-            <a:ext cx="4433777" cy="2462213"/>
+            <a:off x="2242367" y="1837468"/>
+            <a:ext cx="7032263" cy="1600438"/>
           </a:xfrm>
           <a:prstGeom prst="rect">
             <a:avLst/>
@@ -6218,48 +6881,64 @@
           </a:bodyPr>
           <a:lstStyle/>
           <a:p>
-            <a:r>
-              <a:rPr lang="en-US" sz="1400"/>
-              <a:t>Get recommendations for your Linkedin profile.</a:t>
-            </a:r>
-          </a:p>
-          <a:p>
-            <a:r>
-              <a:rPr lang="en-US" sz="1400"/>
-              <a:t>At least 5-10, but 40-50 is better.</a:t>
-            </a:r>
-          </a:p>
-          <a:p>
+            <a:pPr marL="285750" indent="-285750">
+              <a:buFont typeface="Arial" panose="020B0604020202020204" pitchFamily="34" charset="0"/>
+              <a:buChar char="•"/>
+            </a:pPr>
+            <a:r>
+              <a:rPr lang="en-US" sz="1400"/>
+              <a:t>Make simple custom Linkedin URL (example: </a:t>
+            </a:r>
+            <a:r>
+              <a:rPr lang="en-US" sz="1400">
+                <a:hlinkClick r:id="rId2"/>
+              </a:rPr>
+              <a:t>https://www.linkedin.com/in/levselector/</a:t>
+            </a:r>
+            <a:r>
+              <a:rPr lang="en-US" sz="1400"/>
+              <a:t> )</a:t>
+            </a:r>
+          </a:p>
+          <a:p>
+            <a:pPr marL="285750" indent="-285750">
+              <a:buFont typeface="Arial" panose="020B0604020202020204" pitchFamily="34" charset="0"/>
+              <a:buChar char="•"/>
+            </a:pPr>
             <a:endParaRPr lang="en-US" sz="1400"/>
           </a:p>
           <a:p>
-            <a:r>
-              <a:rPr lang="en-US" sz="1400"/>
-              <a:t>People trust when they see positive reviews (recommendations).</a:t>
-            </a:r>
-          </a:p>
-          <a:p>
+            <a:pPr marL="285750" indent="-285750">
+              <a:buFont typeface="Arial" panose="020B0604020202020204" pitchFamily="34" charset="0"/>
+              <a:buChar char="•"/>
+            </a:pPr>
+            <a:r>
+              <a:rPr lang="en-US" sz="1400"/>
+              <a:t>Use the active language of achievement when talking about your experience</a:t>
+            </a:r>
+            <a:br>
+              <a:rPr lang="en-US" sz="1400"/>
+            </a:br>
+            <a:r>
+              <a:rPr lang="en-US" sz="1400"/>
+              <a:t>(designed, built, trained, increased, improved, proposed, ... ). You need to demonstrate accomplishments.</a:t>
+            </a:r>
+          </a:p>
+          <a:p>
+            <a:pPr marL="285750" indent="-285750">
+              <a:buFont typeface="Arial" panose="020B0604020202020204" pitchFamily="34" charset="0"/>
+              <a:buChar char="•"/>
+            </a:pPr>
             <a:endParaRPr lang="en-US" sz="1400"/>
           </a:p>
           <a:p>
-            <a:r>
-              <a:rPr lang="en-US" sz="1400"/>
-              <a:t>This is similar to a trust people experience when</a:t>
-            </a:r>
-          </a:p>
-          <a:p>
-            <a:r>
-              <a:rPr lang="en-US" sz="1400"/>
-              <a:t>they see positive 5-star reviews on amazon.</a:t>
-            </a:r>
-          </a:p>
-          <a:p>
-            <a:endParaRPr lang="en-US" sz="1400"/>
-          </a:p>
-          <a:p>
-            <a:r>
-              <a:rPr lang="en-US" sz="1400"/>
-              <a:t>So - present yourself as a 5-stars "product" using recommendations.</a:t>
+            <a:pPr marL="285750" indent="-285750">
+              <a:buFont typeface="Arial" panose="020B0604020202020204" pitchFamily="34" charset="0"/>
+              <a:buChar char="•"/>
+            </a:pPr>
+            <a:r>
+              <a:rPr lang="en-US" sz="1400"/>
+              <a:t>Include keywords on which you want people to find you when they do search on Linkedin</a:t>
             </a:r>
           </a:p>
         </p:txBody>
@@ -6269,7 +6948,7 @@
           <p:cNvPr id="3" name="TextBox 2">
             <a:extLst>
               <a:ext uri="{FF2B5EF4-FFF2-40B4-BE49-F238E27FC236}">
-                <a16:creationId xmlns:a16="http://schemas.microsoft.com/office/drawing/2014/main" id="{59FD5842-31B3-F740-459C-D71D75065DD1}"/>
+                <a16:creationId xmlns:a16="http://schemas.microsoft.com/office/drawing/2014/main" id="{74D83037-2B95-18D8-0938-BAF6CCCEA73E}"/>
               </a:ext>
             </a:extLst>
           </p:cNvPr>
@@ -6279,7 +6958,7 @@
         <p:spPr>
           <a:xfrm>
             <a:off x="0" y="0"/>
-            <a:ext cx="7422078" cy="523220"/>
+            <a:ext cx="6768935" cy="523220"/>
           </a:xfrm>
           <a:prstGeom prst="rect">
             <a:avLst/>
@@ -6294,15 +6973,491 @@
           <a:p>
             <a:r>
               <a:rPr lang="en-US" sz="2800" b="1"/>
+              <a:t>Writing your experience in resume/linkedin</a:t>
+            </a:r>
+          </a:p>
+        </p:txBody>
+      </p:sp>
+      <p:pic>
+        <p:nvPicPr>
+          <p:cNvPr id="7170" name="Picture 2" descr="Talking About Your Accomplishments in English - YouTube">
+            <a:extLst>
+              <a:ext uri="{FF2B5EF4-FFF2-40B4-BE49-F238E27FC236}">
+                <a16:creationId xmlns:a16="http://schemas.microsoft.com/office/drawing/2014/main" id="{3708BE97-7C7F-22D6-8B78-5827E7B7DB87}"/>
+              </a:ext>
+            </a:extLst>
+          </p:cNvPr>
+          <p:cNvPicPr>
+            <a:picLocks noChangeAspect="1" noChangeArrowheads="1"/>
+          </p:cNvPicPr>
+          <p:nvPr/>
+        </p:nvPicPr>
+        <p:blipFill rotWithShape="1">
+          <a:blip r:embed="rId3" cstate="email">
+            <a:extLst>
+              <a:ext uri="{28A0092B-C50C-407E-A947-70E740481C1C}">
+                <a14:useLocalDpi xmlns:a14="http://schemas.microsoft.com/office/drawing/2010/main"/>
+              </a:ext>
+            </a:extLst>
+          </a:blip>
+          <a:srcRect/>
+          <a:stretch/>
+        </p:blipFill>
+        <p:spPr bwMode="auto">
+          <a:xfrm>
+            <a:off x="4168238" y="4386687"/>
+            <a:ext cx="3487387" cy="1350076"/>
+          </a:xfrm>
+          <a:prstGeom prst="rect">
+            <a:avLst/>
+          </a:prstGeom>
+          <a:noFill/>
+          <a:extLst>
+            <a:ext uri="{909E8E84-426E-40DD-AFC4-6F175D3DCCD1}">
+              <a14:hiddenFill xmlns:a14="http://schemas.microsoft.com/office/drawing/2010/main">
+                <a:solidFill>
+                  <a:srgbClr val="FFFFFF"/>
+                </a:solidFill>
+              </a14:hiddenFill>
+            </a:ext>
+          </a:extLst>
+        </p:spPr>
+      </p:pic>
+    </p:spTree>
+    <p:extLst>
+      <p:ext uri="{BB962C8B-B14F-4D97-AF65-F5344CB8AC3E}">
+        <p14:creationId xmlns:p14="http://schemas.microsoft.com/office/powerpoint/2010/main" val="4024898099"/>
+      </p:ext>
+    </p:extLst>
+  </p:cSld>
+  <p:clrMapOvr>
+    <a:masterClrMapping/>
+  </p:clrMapOvr>
+</p:sld>
+</file>
+
+<file path=ppt/slides/slide17.xml><?xml version="1.0" encoding="utf-8"?>
+<p:sld xmlns:a="http://schemas.openxmlformats.org/drawingml/2006/main" xmlns:r="http://schemas.openxmlformats.org/officeDocument/2006/relationships" xmlns:p="http://schemas.openxmlformats.org/presentationml/2006/main">
+  <p:cSld>
+    <p:spTree>
+      <p:nvGrpSpPr>
+        <p:cNvPr id="1" name=""/>
+        <p:cNvGrpSpPr/>
+        <p:nvPr/>
+      </p:nvGrpSpPr>
+      <p:grpSpPr>
+        <a:xfrm>
+          <a:off x="0" y="0"/>
+          <a:ext cx="0" cy="0"/>
+          <a:chOff x="0" y="0"/>
+          <a:chExt cx="0" cy="0"/>
+        </a:xfrm>
+      </p:grpSpPr>
+      <p:sp>
+        <p:nvSpPr>
+          <p:cNvPr id="2" name="TextBox 1">
+            <a:extLst>
+              <a:ext uri="{FF2B5EF4-FFF2-40B4-BE49-F238E27FC236}">
+                <a16:creationId xmlns:a16="http://schemas.microsoft.com/office/drawing/2014/main" id="{D7ADE524-95E1-8CAC-0C99-A86AE43EEBFD}"/>
+              </a:ext>
+            </a:extLst>
+          </p:cNvPr>
+          <p:cNvSpPr txBox="1"/>
+          <p:nvPr/>
+        </p:nvSpPr>
+        <p:spPr>
+          <a:xfrm>
+            <a:off x="449121" y="1314336"/>
+            <a:ext cx="4433777" cy="2462213"/>
+          </a:xfrm>
+          <a:prstGeom prst="rect">
+            <a:avLst/>
+          </a:prstGeom>
+          <a:solidFill>
+            <a:schemeClr val="accent4">
+              <a:lumMod val="20000"/>
+              <a:lumOff val="80000"/>
+            </a:schemeClr>
+          </a:solidFill>
+          <a:ln>
+            <a:solidFill>
+              <a:srgbClr val="FF0000"/>
+            </a:solidFill>
+          </a:ln>
+        </p:spPr>
+        <p:txBody>
+          <a:bodyPr wrap="square" rtlCol="0">
+            <a:spAutoFit/>
+          </a:bodyPr>
+          <a:lstStyle/>
+          <a:p>
+            <a:r>
+              <a:rPr lang="en-US" sz="1400"/>
+              <a:t>Get recommendations for your Linkedin profile.</a:t>
+            </a:r>
+          </a:p>
+          <a:p>
+            <a:r>
+              <a:rPr lang="en-US" sz="1400"/>
+              <a:t>At least 5-10, but 40-50 is better.</a:t>
+            </a:r>
+          </a:p>
+          <a:p>
+            <a:endParaRPr lang="en-US" sz="1400"/>
+          </a:p>
+          <a:p>
+            <a:r>
+              <a:rPr lang="en-US" sz="1400"/>
+              <a:t>People trust when they see positive reviews (recommendations).</a:t>
+            </a:r>
+          </a:p>
+          <a:p>
+            <a:endParaRPr lang="en-US" sz="1400"/>
+          </a:p>
+          <a:p>
+            <a:r>
+              <a:rPr lang="en-US" sz="1400"/>
+              <a:t>This is similar to a trust people experience when</a:t>
+            </a:r>
+          </a:p>
+          <a:p>
+            <a:r>
+              <a:rPr lang="en-US" sz="1400"/>
+              <a:t>they see positive 5-star reviews on amazon.</a:t>
+            </a:r>
+          </a:p>
+          <a:p>
+            <a:endParaRPr lang="en-US" sz="1400"/>
+          </a:p>
+          <a:p>
+            <a:r>
+              <a:rPr lang="en-US" sz="1400"/>
+              <a:t>So - present yourself as a 5-stars "product" using recommendations.</a:t>
+            </a:r>
+          </a:p>
+        </p:txBody>
+      </p:sp>
+      <p:sp>
+        <p:nvSpPr>
+          <p:cNvPr id="3" name="TextBox 2">
+            <a:extLst>
+              <a:ext uri="{FF2B5EF4-FFF2-40B4-BE49-F238E27FC236}">
+                <a16:creationId xmlns:a16="http://schemas.microsoft.com/office/drawing/2014/main" id="{59FD5842-31B3-F740-459C-D71D75065DD1}"/>
+              </a:ext>
+            </a:extLst>
+          </p:cNvPr>
+          <p:cNvSpPr txBox="1"/>
+          <p:nvPr/>
+        </p:nvSpPr>
+        <p:spPr>
+          <a:xfrm>
+            <a:off x="0" y="0"/>
+            <a:ext cx="7422078" cy="523220"/>
+          </a:xfrm>
+          <a:prstGeom prst="rect">
+            <a:avLst/>
+          </a:prstGeom>
+          <a:noFill/>
+        </p:spPr>
+        <p:txBody>
+          <a:bodyPr wrap="square" rtlCol="0">
+            <a:spAutoFit/>
+          </a:bodyPr>
+          <a:lstStyle/>
+          <a:p>
+            <a:r>
+              <a:rPr lang="en-US" sz="2800" b="1"/>
               <a:t>Get recommendations for your Linkedin profile</a:t>
             </a:r>
           </a:p>
         </p:txBody>
       </p:sp>
+      <p:pic>
+        <p:nvPicPr>
+          <p:cNvPr id="5" name="Picture 4">
+            <a:extLst>
+              <a:ext uri="{FF2B5EF4-FFF2-40B4-BE49-F238E27FC236}">
+                <a16:creationId xmlns:a16="http://schemas.microsoft.com/office/drawing/2014/main" id="{E335DF59-968D-7B4B-2273-1BE210A097E2}"/>
+              </a:ext>
+            </a:extLst>
+          </p:cNvPr>
+          <p:cNvPicPr>
+            <a:picLocks noChangeAspect="1"/>
+          </p:cNvPicPr>
+          <p:nvPr/>
+        </p:nvPicPr>
+        <p:blipFill>
+          <a:blip r:embed="rId2" cstate="email">
+            <a:extLst>
+              <a:ext uri="{28A0092B-C50C-407E-A947-70E740481C1C}">
+                <a14:useLocalDpi xmlns:a14="http://schemas.microsoft.com/office/drawing/2010/main"/>
+              </a:ext>
+            </a:extLst>
+          </a:blip>
+          <a:stretch>
+            <a:fillRect/>
+          </a:stretch>
+        </p:blipFill>
+        <p:spPr>
+          <a:xfrm>
+            <a:off x="7713106" y="944664"/>
+            <a:ext cx="2945245" cy="1136237"/>
+          </a:xfrm>
+          <a:prstGeom prst="rect">
+            <a:avLst/>
+          </a:prstGeom>
+          <a:ln>
+            <a:solidFill>
+              <a:srgbClr val="FF0000"/>
+            </a:solidFill>
+          </a:ln>
+        </p:spPr>
+      </p:pic>
+      <p:pic>
+        <p:nvPicPr>
+          <p:cNvPr id="6" name="Picture 5">
+            <a:extLst>
+              <a:ext uri="{FF2B5EF4-FFF2-40B4-BE49-F238E27FC236}">
+                <a16:creationId xmlns:a16="http://schemas.microsoft.com/office/drawing/2014/main" id="{E77790A9-E796-679B-EB26-E6133799F615}"/>
+              </a:ext>
+            </a:extLst>
+          </p:cNvPr>
+          <p:cNvPicPr>
+            <a:picLocks noChangeAspect="1"/>
+          </p:cNvPicPr>
+          <p:nvPr/>
+        </p:nvPicPr>
+        <p:blipFill>
+          <a:blip r:embed="rId3" cstate="email">
+            <a:extLst>
+              <a:ext uri="{28A0092B-C50C-407E-A947-70E740481C1C}">
+                <a14:useLocalDpi xmlns:a14="http://schemas.microsoft.com/office/drawing/2010/main"/>
+              </a:ext>
+            </a:extLst>
+          </a:blip>
+          <a:stretch>
+            <a:fillRect/>
+          </a:stretch>
+        </p:blipFill>
+        <p:spPr>
+          <a:xfrm>
+            <a:off x="5948425" y="2562336"/>
+            <a:ext cx="4798745" cy="4153668"/>
+          </a:xfrm>
+          <a:prstGeom prst="rect">
+            <a:avLst/>
+          </a:prstGeom>
+          <a:ln>
+            <a:solidFill>
+              <a:srgbClr val="FF0000"/>
+            </a:solidFill>
+          </a:ln>
+        </p:spPr>
+      </p:pic>
     </p:spTree>
     <p:extLst>
       <p:ext uri="{BB962C8B-B14F-4D97-AF65-F5344CB8AC3E}">
         <p14:creationId xmlns:p14="http://schemas.microsoft.com/office/powerpoint/2010/main" val="1929382461"/>
+      </p:ext>
+    </p:extLst>
+  </p:cSld>
+  <p:clrMapOvr>
+    <a:masterClrMapping/>
+  </p:clrMapOvr>
+</p:sld>
+</file>
+
+<file path=ppt/slides/slide18.xml><?xml version="1.0" encoding="utf-8"?>
+<p:sld xmlns:a="http://schemas.openxmlformats.org/drawingml/2006/main" xmlns:r="http://schemas.openxmlformats.org/officeDocument/2006/relationships" xmlns:p="http://schemas.openxmlformats.org/presentationml/2006/main">
+  <p:cSld>
+    <p:spTree>
+      <p:nvGrpSpPr>
+        <p:cNvPr id="1" name=""/>
+        <p:cNvGrpSpPr/>
+        <p:nvPr/>
+      </p:nvGrpSpPr>
+      <p:grpSpPr>
+        <a:xfrm>
+          <a:off x="0" y="0"/>
+          <a:ext cx="0" cy="0"/>
+          <a:chOff x="0" y="0"/>
+          <a:chExt cx="0" cy="0"/>
+        </a:xfrm>
+      </p:grpSpPr>
+      <p:sp>
+        <p:nvSpPr>
+          <p:cNvPr id="2" name="TextBox 1">
+            <a:extLst>
+              <a:ext uri="{FF2B5EF4-FFF2-40B4-BE49-F238E27FC236}">
+                <a16:creationId xmlns:a16="http://schemas.microsoft.com/office/drawing/2014/main" id="{D7ADE524-95E1-8CAC-0C99-A86AE43EEBFD}"/>
+              </a:ext>
+            </a:extLst>
+          </p:cNvPr>
+          <p:cNvSpPr txBox="1"/>
+          <p:nvPr/>
+        </p:nvSpPr>
+        <p:spPr>
+          <a:xfrm>
+            <a:off x="947885" y="1361837"/>
+            <a:ext cx="4407885" cy="954107"/>
+          </a:xfrm>
+          <a:prstGeom prst="rect">
+            <a:avLst/>
+          </a:prstGeom>
+          <a:solidFill>
+            <a:schemeClr val="accent4">
+              <a:lumMod val="20000"/>
+              <a:lumOff val="80000"/>
+            </a:schemeClr>
+          </a:solidFill>
+          <a:ln>
+            <a:solidFill>
+              <a:srgbClr val="FF0000"/>
+            </a:solidFill>
+          </a:ln>
+        </p:spPr>
+        <p:txBody>
+          <a:bodyPr wrap="square" rtlCol="0">
+            <a:spAutoFit/>
+          </a:bodyPr>
+          <a:lstStyle/>
+          <a:p>
+            <a:r>
+              <a:rPr lang="en-US" sz="1400"/>
+              <a:t>Make a list of 10-20 posts.</a:t>
+            </a:r>
+          </a:p>
+          <a:p>
+            <a:r>
+              <a:rPr lang="en-US" sz="1400"/>
+              <a:t>Write 1-2 posts every week – it takes just few minutes.</a:t>
+            </a:r>
+          </a:p>
+          <a:p>
+            <a:r>
+              <a:rPr lang="en-US" sz="1400"/>
+              <a:t>Post in Linkedin groups.</a:t>
+            </a:r>
+          </a:p>
+          <a:p>
+            <a:r>
+              <a:rPr lang="en-US" sz="1400"/>
+              <a:t>Add animated image to a post to attract attention.</a:t>
+            </a:r>
+          </a:p>
+        </p:txBody>
+      </p:sp>
+      <p:sp>
+        <p:nvSpPr>
+          <p:cNvPr id="3" name="TextBox 2">
+            <a:extLst>
+              <a:ext uri="{FF2B5EF4-FFF2-40B4-BE49-F238E27FC236}">
+                <a16:creationId xmlns:a16="http://schemas.microsoft.com/office/drawing/2014/main" id="{59FD5842-31B3-F740-459C-D71D75065DD1}"/>
+              </a:ext>
+            </a:extLst>
+          </p:cNvPr>
+          <p:cNvSpPr txBox="1"/>
+          <p:nvPr/>
+        </p:nvSpPr>
+        <p:spPr>
+          <a:xfrm>
+            <a:off x="0" y="0"/>
+            <a:ext cx="7422078" cy="523220"/>
+          </a:xfrm>
+          <a:prstGeom prst="rect">
+            <a:avLst/>
+          </a:prstGeom>
+          <a:noFill/>
+        </p:spPr>
+        <p:txBody>
+          <a:bodyPr wrap="square" rtlCol="0">
+            <a:spAutoFit/>
+          </a:bodyPr>
+          <a:lstStyle/>
+          <a:p>
+            <a:r>
+              <a:rPr lang="en-US" sz="2800" b="1"/>
+              <a:t>Get visibility by writing posts on Linkedin</a:t>
+            </a:r>
+          </a:p>
+        </p:txBody>
+      </p:sp>
+      <p:pic>
+        <p:nvPicPr>
+          <p:cNvPr id="4" name="Picture 3">
+            <a:extLst>
+              <a:ext uri="{FF2B5EF4-FFF2-40B4-BE49-F238E27FC236}">
+                <a16:creationId xmlns:a16="http://schemas.microsoft.com/office/drawing/2014/main" id="{A351B06B-8EE6-B965-6053-847285946829}"/>
+              </a:ext>
+            </a:extLst>
+          </p:cNvPr>
+          <p:cNvPicPr>
+            <a:picLocks noChangeAspect="1"/>
+          </p:cNvPicPr>
+          <p:nvPr/>
+        </p:nvPicPr>
+        <p:blipFill>
+          <a:blip r:embed="rId2" cstate="email">
+            <a:extLst>
+              <a:ext uri="{28A0092B-C50C-407E-A947-70E740481C1C}">
+                <a14:useLocalDpi xmlns:a14="http://schemas.microsoft.com/office/drawing/2010/main"/>
+              </a:ext>
+            </a:extLst>
+          </a:blip>
+          <a:stretch>
+            <a:fillRect/>
+          </a:stretch>
+        </p:blipFill>
+        <p:spPr>
+          <a:xfrm>
+            <a:off x="7812726" y="1361837"/>
+            <a:ext cx="2171700" cy="3327400"/>
+          </a:xfrm>
+          <a:prstGeom prst="rect">
+            <a:avLst/>
+          </a:prstGeom>
+        </p:spPr>
+      </p:pic>
+      <p:pic>
+        <p:nvPicPr>
+          <p:cNvPr id="7" name="Picture 6">
+            <a:extLst>
+              <a:ext uri="{FF2B5EF4-FFF2-40B4-BE49-F238E27FC236}">
+                <a16:creationId xmlns:a16="http://schemas.microsoft.com/office/drawing/2014/main" id="{BF59CD51-53D3-67A7-3FA4-BFAF409C74A9}"/>
+              </a:ext>
+            </a:extLst>
+          </p:cNvPr>
+          <p:cNvPicPr>
+            <a:picLocks noChangeAspect="1"/>
+          </p:cNvPicPr>
+          <p:nvPr/>
+        </p:nvPicPr>
+        <p:blipFill>
+          <a:blip r:embed="rId3" cstate="email">
+            <a:extLst>
+              <a:ext uri="{28A0092B-C50C-407E-A947-70E740481C1C}">
+                <a14:useLocalDpi xmlns:a14="http://schemas.microsoft.com/office/drawing/2010/main"/>
+              </a:ext>
+            </a:extLst>
+          </a:blip>
+          <a:stretch>
+            <a:fillRect/>
+          </a:stretch>
+        </p:blipFill>
+        <p:spPr>
+          <a:xfrm>
+            <a:off x="3151827" y="2798238"/>
+            <a:ext cx="3023012" cy="3218676"/>
+          </a:xfrm>
+          <a:prstGeom prst="rect">
+            <a:avLst/>
+          </a:prstGeom>
+        </p:spPr>
+      </p:pic>
+    </p:spTree>
+    <p:extLst>
+      <p:ext uri="{BB962C8B-B14F-4D97-AF65-F5344CB8AC3E}">
+        <p14:creationId xmlns:p14="http://schemas.microsoft.com/office/powerpoint/2010/main" val="2601081117"/>
       </p:ext>
     </p:extLst>
   </p:cSld>
@@ -6751,7 +7906,7 @@
         </p:nvSpPr>
         <p:spPr>
           <a:xfrm>
-            <a:off x="3171265" y="1740370"/>
+            <a:off x="2798159" y="1039979"/>
             <a:ext cx="5592725" cy="2677656"/>
           </a:xfrm>
           <a:prstGeom prst="rect">
@@ -6847,7 +8002,7 @@
           <a:p>
             <a:r>
               <a:rPr lang="en-US" sz="1400"/>
-              <a:t>Over a period of 5 years the shift of 2 weeks is only 2/(5*50) ~ 1 percent.</a:t>
+              <a:t>Over a period of 4 years the shift of 2 weeks is only 2/(4*50) ~ 1 percent.</a:t>
             </a:r>
           </a:p>
           <a:p>
@@ -6898,6 +8053,341 @@
             <a:r>
               <a:rPr lang="en-US" sz="2800" b="1"/>
               <a:t>Educate yourself "in advance". Be proactive</a:t>
+            </a:r>
+          </a:p>
+        </p:txBody>
+      </p:sp>
+      <p:sp>
+        <p:nvSpPr>
+          <p:cNvPr id="4" name="TextBox 3">
+            <a:extLst>
+              <a:ext uri="{FF2B5EF4-FFF2-40B4-BE49-F238E27FC236}">
+                <a16:creationId xmlns:a16="http://schemas.microsoft.com/office/drawing/2014/main" id="{34A82D82-91CD-EAC7-012A-57F48167AC6A}"/>
+              </a:ext>
+            </a:extLst>
+          </p:cNvPr>
+          <p:cNvSpPr txBox="1"/>
+          <p:nvPr/>
+        </p:nvSpPr>
+        <p:spPr>
+          <a:xfrm>
+            <a:off x="726053" y="4533502"/>
+            <a:ext cx="2401505" cy="369332"/>
+          </a:xfrm>
+          <a:prstGeom prst="rect">
+            <a:avLst/>
+          </a:prstGeom>
+          <a:solidFill>
+            <a:schemeClr val="accent4">
+              <a:lumMod val="20000"/>
+              <a:lumOff val="80000"/>
+            </a:schemeClr>
+          </a:solidFill>
+          <a:ln>
+            <a:solidFill>
+              <a:srgbClr val="FF0000"/>
+            </a:solidFill>
+          </a:ln>
+        </p:spPr>
+        <p:txBody>
+          <a:bodyPr wrap="square" rtlCol="0">
+            <a:spAutoFit/>
+          </a:bodyPr>
+          <a:lstStyle/>
+          <a:p>
+            <a:pPr algn="ctr"/>
+            <a:r>
+              <a:rPr lang="en-US"/>
+              <a:t>Year 1</a:t>
+            </a:r>
+          </a:p>
+        </p:txBody>
+      </p:sp>
+      <p:sp>
+        <p:nvSpPr>
+          <p:cNvPr id="5" name="TextBox 4">
+            <a:extLst>
+              <a:ext uri="{FF2B5EF4-FFF2-40B4-BE49-F238E27FC236}">
+                <a16:creationId xmlns:a16="http://schemas.microsoft.com/office/drawing/2014/main" id="{2DFAC08E-9C52-B932-4998-7FC4571B6F00}"/>
+              </a:ext>
+            </a:extLst>
+          </p:cNvPr>
+          <p:cNvSpPr txBox="1"/>
+          <p:nvPr/>
+        </p:nvSpPr>
+        <p:spPr>
+          <a:xfrm>
+            <a:off x="3193017" y="4533502"/>
+            <a:ext cx="2401505" cy="369332"/>
+          </a:xfrm>
+          <a:prstGeom prst="rect">
+            <a:avLst/>
+          </a:prstGeom>
+          <a:solidFill>
+            <a:schemeClr val="accent6">
+              <a:lumMod val="20000"/>
+              <a:lumOff val="80000"/>
+            </a:schemeClr>
+          </a:solidFill>
+          <a:ln>
+            <a:solidFill>
+              <a:srgbClr val="FF0000"/>
+            </a:solidFill>
+          </a:ln>
+        </p:spPr>
+        <p:txBody>
+          <a:bodyPr wrap="square" rtlCol="0">
+            <a:spAutoFit/>
+          </a:bodyPr>
+          <a:lstStyle/>
+          <a:p>
+            <a:pPr algn="ctr"/>
+            <a:r>
+              <a:rPr lang="en-US"/>
+              <a:t>Year 2</a:t>
+            </a:r>
+          </a:p>
+        </p:txBody>
+      </p:sp>
+      <p:sp>
+        <p:nvSpPr>
+          <p:cNvPr id="6" name="TextBox 5">
+            <a:extLst>
+              <a:ext uri="{FF2B5EF4-FFF2-40B4-BE49-F238E27FC236}">
+                <a16:creationId xmlns:a16="http://schemas.microsoft.com/office/drawing/2014/main" id="{5654AFFD-824E-006E-3421-1DE527059672}"/>
+              </a:ext>
+            </a:extLst>
+          </p:cNvPr>
+          <p:cNvSpPr txBox="1"/>
+          <p:nvPr/>
+        </p:nvSpPr>
+        <p:spPr>
+          <a:xfrm>
+            <a:off x="5659981" y="4546574"/>
+            <a:ext cx="2401505" cy="369332"/>
+          </a:xfrm>
+          <a:prstGeom prst="rect">
+            <a:avLst/>
+          </a:prstGeom>
+          <a:solidFill>
+            <a:schemeClr val="accent4">
+              <a:lumMod val="20000"/>
+              <a:lumOff val="80000"/>
+            </a:schemeClr>
+          </a:solidFill>
+          <a:ln>
+            <a:solidFill>
+              <a:srgbClr val="FF0000"/>
+            </a:solidFill>
+          </a:ln>
+        </p:spPr>
+        <p:txBody>
+          <a:bodyPr wrap="square" rtlCol="0">
+            <a:spAutoFit/>
+          </a:bodyPr>
+          <a:lstStyle/>
+          <a:p>
+            <a:pPr algn="ctr"/>
+            <a:r>
+              <a:rPr lang="en-US"/>
+              <a:t>Year 3</a:t>
+            </a:r>
+          </a:p>
+        </p:txBody>
+      </p:sp>
+      <p:sp>
+        <p:nvSpPr>
+          <p:cNvPr id="7" name="TextBox 6">
+            <a:extLst>
+              <a:ext uri="{FF2B5EF4-FFF2-40B4-BE49-F238E27FC236}">
+                <a16:creationId xmlns:a16="http://schemas.microsoft.com/office/drawing/2014/main" id="{BC1FF8A0-8A8F-40C4-A2AA-4F9EE3D3345D}"/>
+              </a:ext>
+            </a:extLst>
+          </p:cNvPr>
+          <p:cNvSpPr txBox="1"/>
+          <p:nvPr/>
+        </p:nvSpPr>
+        <p:spPr>
+          <a:xfrm>
+            <a:off x="8126946" y="4546574"/>
+            <a:ext cx="2401505" cy="369332"/>
+          </a:xfrm>
+          <a:prstGeom prst="rect">
+            <a:avLst/>
+          </a:prstGeom>
+          <a:solidFill>
+            <a:schemeClr val="accent6">
+              <a:lumMod val="20000"/>
+              <a:lumOff val="80000"/>
+            </a:schemeClr>
+          </a:solidFill>
+          <a:ln>
+            <a:solidFill>
+              <a:srgbClr val="FF0000"/>
+            </a:solidFill>
+          </a:ln>
+        </p:spPr>
+        <p:txBody>
+          <a:bodyPr wrap="square" rtlCol="0">
+            <a:spAutoFit/>
+          </a:bodyPr>
+          <a:lstStyle/>
+          <a:p>
+            <a:pPr algn="ctr"/>
+            <a:r>
+              <a:rPr lang="en-US"/>
+              <a:t>Year 4</a:t>
+            </a:r>
+          </a:p>
+        </p:txBody>
+      </p:sp>
+      <p:cxnSp>
+        <p:nvCxnSpPr>
+          <p:cNvPr id="10" name="Straight Arrow Connector 9">
+            <a:extLst>
+              <a:ext uri="{FF2B5EF4-FFF2-40B4-BE49-F238E27FC236}">
+                <a16:creationId xmlns:a16="http://schemas.microsoft.com/office/drawing/2014/main" id="{0EAA32A8-F796-F889-13B6-5DA574B2F659}"/>
+              </a:ext>
+            </a:extLst>
+          </p:cNvPr>
+          <p:cNvCxnSpPr/>
+          <p:nvPr/>
+        </p:nvCxnSpPr>
+        <p:spPr>
+          <a:xfrm>
+            <a:off x="878453" y="5223164"/>
+            <a:ext cx="9802398" cy="0"/>
+          </a:xfrm>
+          <a:prstGeom prst="straightConnector1">
+            <a:avLst/>
+          </a:prstGeom>
+          <a:ln w="63500">
+            <a:tailEnd type="triangle"/>
+          </a:ln>
+        </p:spPr>
+        <p:style>
+          <a:lnRef idx="1">
+            <a:schemeClr val="accent1"/>
+          </a:lnRef>
+          <a:fillRef idx="0">
+            <a:schemeClr val="accent1"/>
+          </a:fillRef>
+          <a:effectRef idx="0">
+            <a:schemeClr val="accent1"/>
+          </a:effectRef>
+          <a:fontRef idx="minor">
+            <a:schemeClr val="tx1"/>
+          </a:fontRef>
+        </p:style>
+      </p:cxnSp>
+      <p:cxnSp>
+        <p:nvCxnSpPr>
+          <p:cNvPr id="11" name="Straight Arrow Connector 10">
+            <a:extLst>
+              <a:ext uri="{FF2B5EF4-FFF2-40B4-BE49-F238E27FC236}">
+                <a16:creationId xmlns:a16="http://schemas.microsoft.com/office/drawing/2014/main" id="{5263C0DE-AC3B-CF97-433F-E18611FBCEA6}"/>
+              </a:ext>
+            </a:extLst>
+          </p:cNvPr>
+          <p:cNvCxnSpPr/>
+          <p:nvPr/>
+        </p:nvCxnSpPr>
+        <p:spPr>
+          <a:xfrm>
+            <a:off x="567716" y="5387439"/>
+            <a:ext cx="9802398" cy="0"/>
+          </a:xfrm>
+          <a:prstGeom prst="straightConnector1">
+            <a:avLst/>
+          </a:prstGeom>
+          <a:ln w="63500">
+            <a:solidFill>
+              <a:srgbClr val="FF0000"/>
+            </a:solidFill>
+            <a:tailEnd type="triangle"/>
+          </a:ln>
+        </p:spPr>
+        <p:style>
+          <a:lnRef idx="1">
+            <a:schemeClr val="accent1"/>
+          </a:lnRef>
+          <a:fillRef idx="0">
+            <a:schemeClr val="accent1"/>
+          </a:fillRef>
+          <a:effectRef idx="0">
+            <a:schemeClr val="accent1"/>
+          </a:effectRef>
+          <a:fontRef idx="minor">
+            <a:schemeClr val="tx1"/>
+          </a:fontRef>
+        </p:style>
+      </p:cxnSp>
+      <p:sp>
+        <p:nvSpPr>
+          <p:cNvPr id="12" name="TextBox 11">
+            <a:extLst>
+              <a:ext uri="{FF2B5EF4-FFF2-40B4-BE49-F238E27FC236}">
+                <a16:creationId xmlns:a16="http://schemas.microsoft.com/office/drawing/2014/main" id="{3271C0CE-5EF5-59CC-BF95-D627B56F0144}"/>
+              </a:ext>
+            </a:extLst>
+          </p:cNvPr>
+          <p:cNvSpPr txBox="1"/>
+          <p:nvPr/>
+        </p:nvSpPr>
+        <p:spPr>
+          <a:xfrm>
+            <a:off x="10842171" y="5058888"/>
+            <a:ext cx="855024" cy="307777"/>
+          </a:xfrm>
+          <a:prstGeom prst="rect">
+            <a:avLst/>
+          </a:prstGeom>
+          <a:noFill/>
+        </p:spPr>
+        <p:txBody>
+          <a:bodyPr wrap="square" rtlCol="0">
+            <a:spAutoFit/>
+          </a:bodyPr>
+          <a:lstStyle/>
+          <a:p>
+            <a:r>
+              <a:rPr lang="en-US" sz="1400"/>
+              <a:t>Late</a:t>
+            </a:r>
+          </a:p>
+        </p:txBody>
+      </p:sp>
+      <p:sp>
+        <p:nvSpPr>
+          <p:cNvPr id="13" name="TextBox 12">
+            <a:extLst>
+              <a:ext uri="{FF2B5EF4-FFF2-40B4-BE49-F238E27FC236}">
+                <a16:creationId xmlns:a16="http://schemas.microsoft.com/office/drawing/2014/main" id="{9134F823-B13E-222D-EB1E-EB3B4977A67C}"/>
+              </a:ext>
+            </a:extLst>
+          </p:cNvPr>
+          <p:cNvSpPr txBox="1"/>
+          <p:nvPr/>
+        </p:nvSpPr>
+        <p:spPr>
+          <a:xfrm>
+            <a:off x="10414660" y="5332020"/>
+            <a:ext cx="855024" cy="307777"/>
+          </a:xfrm>
+          <a:prstGeom prst="rect">
+            <a:avLst/>
+          </a:prstGeom>
+          <a:noFill/>
+        </p:spPr>
+        <p:txBody>
+          <a:bodyPr wrap="square" rtlCol="0">
+            <a:spAutoFit/>
+          </a:bodyPr>
+          <a:lstStyle/>
+          <a:p>
+            <a:r>
+              <a:rPr lang="en-US" sz="1400"/>
+              <a:t>Ahead</a:t>
             </a:r>
           </a:p>
         </p:txBody>
@@ -6946,8 +8436,8 @@
         </p:nvSpPr>
         <p:spPr>
           <a:xfrm>
-            <a:off x="1674421" y="1327619"/>
-            <a:ext cx="7853916" cy="3323987"/>
+            <a:off x="629392" y="1624502"/>
+            <a:ext cx="2968831" cy="738664"/>
           </a:xfrm>
           <a:prstGeom prst="rect">
             <a:avLst/>
@@ -6976,83 +8466,23 @@
             </a:r>
           </a:p>
           <a:p>
-            <a:r>
-              <a:rPr lang="en-US" sz="1400"/>
-              <a:t>     to get a job you need experience,</a:t>
-            </a:r>
-          </a:p>
-          <a:p>
-            <a:r>
-              <a:rPr lang="en-US" sz="1400"/>
-              <a:t>     to get experience you need a job.</a:t>
-            </a:r>
-          </a:p>
-          <a:p>
-            <a:endParaRPr lang="en-US" sz="1400"/>
-          </a:p>
-          <a:p>
-            <a:r>
-              <a:rPr lang="en-US" sz="1400"/>
-              <a:t>You always get this problem when you want to get a higher position.</a:t>
-            </a:r>
-          </a:p>
-          <a:p>
-            <a:r>
-              <a:rPr lang="en-US" sz="1400"/>
-              <a:t>For example, you want to become a manager – but you don't have management experience.</a:t>
-            </a:r>
-          </a:p>
-          <a:p>
-            <a:endParaRPr lang="en-US" sz="1400"/>
-          </a:p>
-          <a:p>
-            <a:r>
-              <a:rPr lang="en-US" sz="1400"/>
-              <a:t>You always have this problem, because technologies change.</a:t>
-            </a:r>
-          </a:p>
-          <a:p>
-            <a:r>
-              <a:rPr lang="en-US" sz="1400"/>
-              <a:t>So next job may require technology which you haven't used on your previous job.</a:t>
-            </a:r>
-          </a:p>
-          <a:p>
-            <a:endParaRPr lang="en-US" sz="1400"/>
-          </a:p>
-          <a:p>
-            <a:r>
-              <a:rPr lang="en-US" sz="1400"/>
-              <a:t>There are only two ways to break out of this catch-22 cycle:</a:t>
-            </a:r>
-          </a:p>
-          <a:p>
-            <a:r>
-              <a:rPr lang="en-US" sz="1400"/>
-              <a:t>      Method 1: get real experience</a:t>
-            </a:r>
-          </a:p>
-          <a:p>
-            <a:r>
-              <a:rPr lang="en-US" sz="1400"/>
-              <a:t>      Method 2: get some education - and convince that you are really excited and can do the job</a:t>
-            </a:r>
-          </a:p>
-          <a:p>
-            <a:endParaRPr lang="en-US" sz="1400"/>
-          </a:p>
-          <a:p>
-            <a:r>
-              <a:rPr lang="en-US" sz="1400"/>
-              <a:t>In most cases I was using 2</a:t>
-            </a:r>
-            <a:r>
-              <a:rPr lang="en-US" sz="1400" baseline="30000"/>
-              <a:t>nd</a:t>
-            </a:r>
-            <a:r>
-              <a:rPr lang="en-US" sz="1400"/>
-              <a:t> method.</a:t>
+            <a:pPr marL="285750" indent="-285750">
+              <a:buFont typeface="Arial" panose="020B0604020202020204" pitchFamily="34" charset="0"/>
+              <a:buChar char="•"/>
+            </a:pPr>
+            <a:r>
+              <a:rPr lang="en-US" sz="1400"/>
+              <a:t>to get a job you need experience,</a:t>
+            </a:r>
+          </a:p>
+          <a:p>
+            <a:pPr marL="285750" indent="-285750">
+              <a:buFont typeface="Arial" panose="020B0604020202020204" pitchFamily="34" charset="0"/>
+              <a:buChar char="•"/>
+            </a:pPr>
+            <a:r>
+              <a:rPr lang="en-US" sz="1400"/>
+              <a:t>to get experience you need a job.</a:t>
             </a:r>
           </a:p>
         </p:txBody>
@@ -7092,6 +8522,221 @@
           </a:p>
         </p:txBody>
       </p:sp>
+      <p:sp>
+        <p:nvSpPr>
+          <p:cNvPr id="4" name="TextBox 3">
+            <a:extLst>
+              <a:ext uri="{FF2B5EF4-FFF2-40B4-BE49-F238E27FC236}">
+                <a16:creationId xmlns:a16="http://schemas.microsoft.com/office/drawing/2014/main" id="{1D8CD7AC-35EB-7BA4-157F-C760BCE66167}"/>
+              </a:ext>
+            </a:extLst>
+          </p:cNvPr>
+          <p:cNvSpPr txBox="1"/>
+          <p:nvPr/>
+        </p:nvSpPr>
+        <p:spPr>
+          <a:xfrm>
+            <a:off x="629392" y="2527028"/>
+            <a:ext cx="3479470" cy="954107"/>
+          </a:xfrm>
+          <a:prstGeom prst="rect">
+            <a:avLst/>
+          </a:prstGeom>
+          <a:solidFill>
+            <a:schemeClr val="accent4">
+              <a:lumMod val="20000"/>
+              <a:lumOff val="80000"/>
+            </a:schemeClr>
+          </a:solidFill>
+          <a:ln>
+            <a:solidFill>
+              <a:srgbClr val="FF0000"/>
+            </a:solidFill>
+          </a:ln>
+        </p:spPr>
+        <p:txBody>
+          <a:bodyPr wrap="square" rtlCol="0">
+            <a:spAutoFit/>
+          </a:bodyPr>
+          <a:lstStyle/>
+          <a:p>
+            <a:r>
+              <a:rPr lang="en-US" sz="1400"/>
+              <a:t>Everyone gets this problem:</a:t>
+            </a:r>
+          </a:p>
+          <a:p>
+            <a:pPr marL="285750" indent="-285750">
+              <a:buFont typeface="Arial" panose="020B0604020202020204" pitchFamily="34" charset="0"/>
+              <a:buChar char="•"/>
+            </a:pPr>
+            <a:r>
+              <a:rPr lang="en-US" sz="1400"/>
+              <a:t>when getting into a new field</a:t>
+            </a:r>
+          </a:p>
+          <a:p>
+            <a:pPr marL="285750" indent="-285750">
+              <a:buFont typeface="Arial" panose="020B0604020202020204" pitchFamily="34" charset="0"/>
+              <a:buChar char="•"/>
+            </a:pPr>
+            <a:r>
+              <a:rPr lang="en-US" sz="1400"/>
+              <a:t>when interviewing for a higher position</a:t>
+            </a:r>
+          </a:p>
+          <a:p>
+            <a:pPr marL="285750" indent="-285750">
+              <a:buFont typeface="Arial" panose="020B0604020202020204" pitchFamily="34" charset="0"/>
+              <a:buChar char="•"/>
+            </a:pPr>
+            <a:r>
+              <a:rPr lang="en-US" sz="1400"/>
+              <a:t>when technologies change</a:t>
+            </a:r>
+          </a:p>
+        </p:txBody>
+      </p:sp>
+      <p:sp>
+        <p:nvSpPr>
+          <p:cNvPr id="5" name="TextBox 4">
+            <a:extLst>
+              <a:ext uri="{FF2B5EF4-FFF2-40B4-BE49-F238E27FC236}">
+                <a16:creationId xmlns:a16="http://schemas.microsoft.com/office/drawing/2014/main" id="{6FC5EFB5-149B-62C0-34B9-A9A443CA6B8F}"/>
+              </a:ext>
+            </a:extLst>
+          </p:cNvPr>
+          <p:cNvSpPr txBox="1"/>
+          <p:nvPr/>
+        </p:nvSpPr>
+        <p:spPr>
+          <a:xfrm>
+            <a:off x="629392" y="3644997"/>
+            <a:ext cx="4714504" cy="1815882"/>
+          </a:xfrm>
+          <a:prstGeom prst="rect">
+            <a:avLst/>
+          </a:prstGeom>
+          <a:solidFill>
+            <a:schemeClr val="accent4">
+              <a:lumMod val="20000"/>
+              <a:lumOff val="80000"/>
+            </a:schemeClr>
+          </a:solidFill>
+          <a:ln>
+            <a:solidFill>
+              <a:srgbClr val="FF0000"/>
+            </a:solidFill>
+          </a:ln>
+        </p:spPr>
+        <p:txBody>
+          <a:bodyPr wrap="square" rtlCol="0">
+            <a:spAutoFit/>
+          </a:bodyPr>
+          <a:lstStyle/>
+          <a:p>
+            <a:r>
+              <a:rPr lang="en-US" sz="1400"/>
+              <a:t>There are only two ways to break out of this catch-22 cycle:</a:t>
+            </a:r>
+            <a:br>
+              <a:rPr lang="en-US" sz="1400"/>
+            </a:br>
+            <a:endParaRPr lang="en-US" sz="1400"/>
+          </a:p>
+          <a:p>
+            <a:pPr marL="285750" indent="-285750">
+              <a:buFont typeface="Arial" panose="020B0604020202020204" pitchFamily="34" charset="0"/>
+              <a:buChar char="•"/>
+            </a:pPr>
+            <a:r>
+              <a:rPr lang="en-US" sz="1400"/>
+              <a:t>Method 1: get real experience</a:t>
+            </a:r>
+          </a:p>
+          <a:p>
+            <a:pPr marL="285750" indent="-285750">
+              <a:buFont typeface="Arial" panose="020B0604020202020204" pitchFamily="34" charset="0"/>
+              <a:buChar char="•"/>
+            </a:pPr>
+            <a:endParaRPr lang="en-US" sz="1400"/>
+          </a:p>
+          <a:p>
+            <a:pPr marL="285750" indent="-285750">
+              <a:buFont typeface="Arial" panose="020B0604020202020204" pitchFamily="34" charset="0"/>
+              <a:buChar char="•"/>
+            </a:pPr>
+            <a:r>
+              <a:rPr lang="en-US" sz="1400"/>
+              <a:t>Method 2: sell your enthusiasm. Get some education, and convince that you are really excited and can do the job</a:t>
+            </a:r>
+          </a:p>
+          <a:p>
+            <a:endParaRPr lang="en-US" sz="1400"/>
+          </a:p>
+          <a:p>
+            <a:r>
+              <a:rPr lang="en-US" sz="1400"/>
+              <a:t>In most cases I was using 2</a:t>
+            </a:r>
+            <a:r>
+              <a:rPr lang="en-US" sz="1400" baseline="30000"/>
+              <a:t>nd</a:t>
+            </a:r>
+            <a:r>
+              <a:rPr lang="en-US" sz="1400"/>
+              <a:t> method.</a:t>
+            </a:r>
+          </a:p>
+        </p:txBody>
+      </p:sp>
+      <p:pic>
+        <p:nvPicPr>
+          <p:cNvPr id="2050" name="Picture 2" descr="When a resume specialist can't help -- avoiding a Job/Experience Catch 22">
+            <a:extLst>
+              <a:ext uri="{FF2B5EF4-FFF2-40B4-BE49-F238E27FC236}">
+                <a16:creationId xmlns:a16="http://schemas.microsoft.com/office/drawing/2014/main" id="{952E54B8-B578-1422-76B7-640BB4E4EA42}"/>
+              </a:ext>
+            </a:extLst>
+          </p:cNvPr>
+          <p:cNvPicPr>
+            <a:picLocks noChangeAspect="1" noChangeArrowheads="1"/>
+          </p:cNvPicPr>
+          <p:nvPr/>
+        </p:nvPicPr>
+        <p:blipFill>
+          <a:blip r:embed="rId2" cstate="email">
+            <a:extLst>
+              <a:ext uri="{28A0092B-C50C-407E-A947-70E740481C1C}">
+                <a14:useLocalDpi xmlns:a14="http://schemas.microsoft.com/office/drawing/2010/main"/>
+              </a:ext>
+            </a:extLst>
+          </a:blip>
+          <a:srcRect/>
+          <a:stretch>
+            <a:fillRect/>
+          </a:stretch>
+        </p:blipFill>
+        <p:spPr bwMode="auto">
+          <a:xfrm>
+            <a:off x="6290750" y="1850127"/>
+            <a:ext cx="4974693" cy="2798265"/>
+          </a:xfrm>
+          <a:prstGeom prst="rect">
+            <a:avLst/>
+          </a:prstGeom>
+          <a:noFill/>
+          <a:extLst>
+            <a:ext uri="{909E8E84-426E-40DD-AFC4-6F175D3DCCD1}">
+              <a14:hiddenFill xmlns:a14="http://schemas.microsoft.com/office/drawing/2010/main">
+                <a:solidFill>
+                  <a:srgbClr val="FFFFFF"/>
+                </a:solidFill>
+              </a14:hiddenFill>
+            </a:ext>
+          </a:extLst>
+        </p:spPr>
+      </p:pic>
     </p:spTree>
     <p:extLst>
       <p:ext uri="{BB962C8B-B14F-4D97-AF65-F5344CB8AC3E}">
@@ -7136,7 +8781,7 @@
         </p:nvSpPr>
         <p:spPr>
           <a:xfrm>
-            <a:off x="457200" y="1212111"/>
+            <a:off x="409698" y="1176884"/>
             <a:ext cx="5256028" cy="2677656"/>
           </a:xfrm>
           <a:prstGeom prst="rect">
@@ -7161,8 +8806,16 @@
           <a:lstStyle/>
           <a:p>
             <a:r>
-              <a:rPr lang="en-US" sz="1400"/>
-              <a:t>I had a friend who always felt that he needs to study more.</a:t>
+              <a:rPr lang="en-US" sz="1400" b="1">
+                <a:solidFill>
+                  <a:srgbClr val="00B0F0"/>
+                </a:solidFill>
+              </a:rPr>
+              <a:t>I had a friend</a:t>
+            </a:r>
+            <a:r>
+              <a:rPr lang="en-US" sz="1400"/>
+              <a:t> who always felt that he needs to study more.</a:t>
             </a:r>
           </a:p>
           <a:p>
@@ -7177,7 +8830,19 @@
           <a:p>
             <a:r>
               <a:rPr lang="en-US" sz="1400"/>
-              <a:t>But if you don't go out and do the interviews, nothing happens.</a:t>
+              <a:t>But </a:t>
+            </a:r>
+            <a:r>
+              <a:rPr lang="en-US" sz="1400" b="1">
+                <a:solidFill>
+                  <a:srgbClr val="FF0000"/>
+                </a:solidFill>
+              </a:rPr>
+              <a:t>if you don't go out and do the interviews, nothing happens</a:t>
+            </a:r>
+            <a:r>
+              <a:rPr lang="en-US" sz="1400"/>
+              <a:t>.</a:t>
             </a:r>
           </a:p>
           <a:p>
@@ -7212,13 +8877,21 @@
           </a:p>
           <a:p>
             <a:r>
-              <a:rPr lang="en-US" sz="1400"/>
+              <a:rPr lang="en-US" sz="1400" b="1">
+                <a:solidFill>
+                  <a:srgbClr val="FF0000"/>
+                </a:solidFill>
+              </a:rPr>
               <a:t>More studying will increase your chances by 5%.</a:t>
             </a:r>
           </a:p>
           <a:p>
             <a:r>
-              <a:rPr lang="en-US" sz="1400"/>
+              <a:rPr lang="en-US" sz="1400" b="1">
+                <a:solidFill>
+                  <a:srgbClr val="FF0000"/>
+                </a:solidFill>
+              </a:rPr>
               <a:t>More interviewing will increase your chances by 100%.</a:t>
             </a:r>
           </a:p>
@@ -7239,7 +8912,7 @@
         <p:spPr>
           <a:xfrm>
             <a:off x="7072308" y="1212111"/>
-            <a:ext cx="3965945" cy="2246769"/>
+            <a:ext cx="3965945" cy="2031325"/>
           </a:xfrm>
           <a:prstGeom prst="rect">
             <a:avLst/>
@@ -7263,8 +8936,16 @@
           <a:lstStyle/>
           <a:p>
             <a:r>
-              <a:rPr lang="en-US" sz="1400"/>
-              <a:t>I knew a guy who was absolutely useless at work,</a:t>
+              <a:rPr lang="en-US" sz="1400" b="1">
+                <a:solidFill>
+                  <a:srgbClr val="00B0F0"/>
+                </a:solidFill>
+              </a:rPr>
+              <a:t>I knew a guy</a:t>
+            </a:r>
+            <a:r>
+              <a:rPr lang="en-US" sz="1400"/>
+              <a:t> who was absolutely useless at work,</a:t>
             </a:r>
           </a:p>
           <a:p>
@@ -7285,7 +8966,19 @@
           <a:p>
             <a:r>
               <a:rPr lang="en-US" sz="1400"/>
-              <a:t>Result - he was getting high-paying jobs.</a:t>
+              <a:t>Result - </a:t>
+            </a:r>
+            <a:r>
+              <a:rPr lang="en-US" sz="1400" b="1">
+                <a:solidFill>
+                  <a:srgbClr val="FF0000"/>
+                </a:solidFill>
+              </a:rPr>
+              <a:t>he was getting high-paying jobs</a:t>
+            </a:r>
+            <a:r>
+              <a:rPr lang="en-US" sz="1400"/>
+              <a:t>.</a:t>
             </a:r>
           </a:p>
           <a:p>
@@ -7299,18 +8992,23 @@
           </a:p>
           <a:p>
             <a:r>
-              <a:rPr lang="en-US" sz="1400"/>
+              <a:rPr lang="en-US" sz="1400" b="1">
+                <a:solidFill>
+                  <a:srgbClr val="FF0000"/>
+                </a:solidFill>
+              </a:rPr>
               <a:t>So he was paid more than people around him.</a:t>
             </a:r>
           </a:p>
           <a:p>
             <a:r>
-              <a:rPr lang="en-US" sz="1400"/>
-              <a:t>But - he was useless at work, not productive.</a:t>
-            </a:r>
-          </a:p>
-          <a:p>
-            <a:endParaRPr lang="en-US" sz="1400"/>
+              <a:rPr lang="en-US" sz="1400" b="1">
+                <a:solidFill>
+                  <a:srgbClr val="FF0000"/>
+                </a:solidFill>
+              </a:rPr>
+              <a:t>Although he was useless at work, not productive.</a:t>
+            </a:r>
           </a:p>
         </p:txBody>
       </p:sp>
@@ -7328,7 +9026,7 @@
         </p:nvSpPr>
         <p:spPr>
           <a:xfrm>
-            <a:off x="4369983" y="4508204"/>
+            <a:off x="3921642" y="4508204"/>
             <a:ext cx="4348716" cy="1815882"/>
           </a:xfrm>
           <a:prstGeom prst="rect">
@@ -7362,7 +9060,11 @@
           </a:p>
           <a:p>
             <a:r>
-              <a:rPr lang="en-US" sz="1400"/>
+              <a:rPr lang="en-US" sz="1400" b="1">
+                <a:solidFill>
+                  <a:srgbClr val="FF0000"/>
+                </a:solidFill>
+              </a:rPr>
               <a:t>Those who go on interviews - get jobs and earn more.</a:t>
             </a:r>
           </a:p>
@@ -7386,8 +9088,12 @@
           </a:p>
           <a:p>
             <a:r>
-              <a:rPr lang="en-US" sz="1400"/>
-              <a:t>So, do not procrastinate - just get a job.</a:t>
+              <a:rPr lang="en-US" sz="1400" b="1">
+                <a:solidFill>
+                  <a:srgbClr val="FF0000"/>
+                </a:solidFill>
+              </a:rPr>
+              <a:t>So, do not procrastinate - just start interviewing.</a:t>
             </a:r>
           </a:p>
         </p:txBody>
@@ -7423,6 +9129,60 @@
             <a:r>
               <a:rPr lang="en-US" sz="2800" b="1"/>
               <a:t>Stop studying – and start interviewing</a:t>
+            </a:r>
+          </a:p>
+        </p:txBody>
+      </p:sp>
+      <p:sp>
+        <p:nvSpPr>
+          <p:cNvPr id="6" name="TextBox 5">
+            <a:extLst>
+              <a:ext uri="{FF2B5EF4-FFF2-40B4-BE49-F238E27FC236}">
+                <a16:creationId xmlns:a16="http://schemas.microsoft.com/office/drawing/2014/main" id="{31B115F5-6191-A98D-366B-89B7A4B74DEE}"/>
+              </a:ext>
+            </a:extLst>
+          </p:cNvPr>
+          <p:cNvSpPr txBox="1"/>
+          <p:nvPr/>
+        </p:nvSpPr>
+        <p:spPr>
+          <a:xfrm>
+            <a:off x="8823366" y="4311571"/>
+            <a:ext cx="3194463" cy="1384995"/>
+          </a:xfrm>
+          <a:prstGeom prst="rect">
+            <a:avLst/>
+          </a:prstGeom>
+          <a:solidFill>
+            <a:schemeClr val="accent5">
+              <a:lumMod val="20000"/>
+              <a:lumOff val="80000"/>
+            </a:schemeClr>
+          </a:solidFill>
+          <a:ln>
+            <a:solidFill>
+              <a:srgbClr val="FF0000"/>
+            </a:solidFill>
+          </a:ln>
+        </p:spPr>
+        <p:txBody>
+          <a:bodyPr wrap="square" rtlCol="0">
+            <a:spAutoFit/>
+          </a:bodyPr>
+          <a:lstStyle/>
+          <a:p>
+            <a:r>
+              <a:rPr lang="en-US" sz="1400"/>
+              <a:t>Bottleneck is usually not in your incomplete knowledge. Nobody is perfect.</a:t>
+            </a:r>
+          </a:p>
+          <a:p>
+            <a:endParaRPr lang="en-US" sz="1400"/>
+          </a:p>
+          <a:p>
+            <a:r>
+              <a:rPr lang="en-US" sz="1400"/>
+              <a:t>Bottleneck is usually in not doing enough marketing, selling and interviewing.</a:t>
             </a:r>
           </a:p>
         </p:txBody>
@@ -7471,7 +9231,7 @@
         </p:nvSpPr>
         <p:spPr>
           <a:xfrm>
-            <a:off x="3147237" y="1392865"/>
+            <a:off x="1203643" y="1428491"/>
             <a:ext cx="4892357" cy="3539430"/>
           </a:xfrm>
           <a:prstGeom prst="rect">
@@ -7632,6 +9392,53 @@
           </a:p>
         </p:txBody>
       </p:sp>
+      <p:pic>
+        <p:nvPicPr>
+          <p:cNvPr id="3074" name="Picture 2" descr="Most Common Job Interview Questions. - Institute of Career Development,  Bangladesh - ICDB">
+            <a:extLst>
+              <a:ext uri="{FF2B5EF4-FFF2-40B4-BE49-F238E27FC236}">
+                <a16:creationId xmlns:a16="http://schemas.microsoft.com/office/drawing/2014/main" id="{8DC276C7-BBD9-34D7-A211-EFF138E55B3F}"/>
+              </a:ext>
+            </a:extLst>
+          </p:cNvPr>
+          <p:cNvPicPr>
+            <a:picLocks noChangeAspect="1" noChangeArrowheads="1"/>
+          </p:cNvPicPr>
+          <p:nvPr/>
+        </p:nvPicPr>
+        <p:blipFill>
+          <a:blip r:embed="rId2" cstate="email">
+            <a:extLst>
+              <a:ext uri="{28A0092B-C50C-407E-A947-70E740481C1C}">
+                <a14:useLocalDpi xmlns:a14="http://schemas.microsoft.com/office/drawing/2010/main"/>
+              </a:ext>
+            </a:extLst>
+          </a:blip>
+          <a:srcRect/>
+          <a:stretch>
+            <a:fillRect/>
+          </a:stretch>
+        </p:blipFill>
+        <p:spPr bwMode="auto">
+          <a:xfrm>
+            <a:off x="7386451" y="2061928"/>
+            <a:ext cx="3769921" cy="2513281"/>
+          </a:xfrm>
+          <a:prstGeom prst="rect">
+            <a:avLst/>
+          </a:prstGeom>
+          <a:noFill/>
+          <a:extLst>
+            <a:ext uri="{909E8E84-426E-40DD-AFC4-6F175D3DCCD1}">
+              <a14:hiddenFill xmlns:a14="http://schemas.microsoft.com/office/drawing/2010/main">
+                <a:solidFill>
+                  <a:srgbClr val="FFFFFF"/>
+                </a:solidFill>
+              </a14:hiddenFill>
+            </a:ext>
+          </a:extLst>
+        </p:spPr>
+      </p:pic>
     </p:spTree>
     <p:extLst>
       <p:ext uri="{BB962C8B-B14F-4D97-AF65-F5344CB8AC3E}">
@@ -7983,8 +9790,8 @@
         </p:nvSpPr>
         <p:spPr>
           <a:xfrm>
-            <a:off x="2094199" y="801169"/>
-            <a:ext cx="7916700" cy="5693866"/>
+            <a:off x="1465844" y="741792"/>
+            <a:ext cx="6015611" cy="5909310"/>
           </a:xfrm>
           <a:prstGeom prst="rect">
             <a:avLst/>
@@ -8008,8 +9815,12 @@
           <a:lstStyle/>
           <a:p>
             <a:r>
-              <a:rPr lang="en-US" sz="1400"/>
-              <a:t>It is much easier to pass the interview for skills/technologies which is NEW.</a:t>
+              <a:rPr lang="en-US" sz="1400" b="1">
+                <a:solidFill>
+                  <a:srgbClr val="FF0000"/>
+                </a:solidFill>
+              </a:rPr>
+              <a:t>It is much easier to pass the interview for skills/technologies which are NEW.</a:t>
             </a:r>
           </a:p>
           <a:p>
@@ -8017,28 +9828,48 @@
           </a:p>
           <a:p>
             <a:r>
-              <a:rPr lang="en-US" sz="1400"/>
+              <a:rPr lang="en-US" sz="1400">
+                <a:solidFill>
+                  <a:srgbClr val="00B0F0"/>
+                </a:solidFill>
+              </a:rPr>
               <a:t>The older is the technology - the stronger the competition, </a:t>
             </a:r>
           </a:p>
           <a:p>
             <a:r>
-              <a:rPr lang="en-US" sz="1400"/>
+              <a:rPr lang="en-US" sz="1400">
+                <a:solidFill>
+                  <a:srgbClr val="00B0F0"/>
+                </a:solidFill>
+              </a:rPr>
               <a:t>and more detailed and difficult is the interview. </a:t>
             </a:r>
           </a:p>
           <a:p>
-            <a:endParaRPr lang="en-US" sz="1400"/>
-          </a:p>
-          <a:p>
-            <a:r>
-              <a:rPr lang="en-US" sz="1400"/>
+            <a:endParaRPr lang="en-US" sz="1400">
+              <a:solidFill>
+                <a:srgbClr val="00B0F0"/>
+              </a:solidFill>
+            </a:endParaRPr>
+          </a:p>
+          <a:p>
+            <a:r>
+              <a:rPr lang="en-US" sz="1400">
+                <a:solidFill>
+                  <a:srgbClr val="FF0000"/>
+                </a:solidFill>
+              </a:rPr>
               <a:t>But for a new technology you can pass the interview </a:t>
             </a:r>
           </a:p>
           <a:p>
             <a:r>
-              <a:rPr lang="en-US" sz="1400"/>
+              <a:rPr lang="en-US" sz="1400">
+                <a:solidFill>
+                  <a:srgbClr val="FF0000"/>
+                </a:solidFill>
+              </a:rPr>
               <a:t>by simply talking in general terms.</a:t>
             </a:r>
           </a:p>
@@ -8085,19 +9916,28 @@
           <a:p>
             <a:r>
               <a:rPr lang="en-US" sz="1400"/>
-              <a:t>Sometimes if you demonstrate that you are really excited about this new technology,</a:t>
-            </a:r>
-          </a:p>
-          <a:p>
-            <a:r>
-              <a:rPr lang="en-US" sz="1400"/>
-              <a:t>it is enough toget hired.</a:t>
-            </a:r>
-          </a:p>
-          <a:p>
-            <a:r>
-              <a:rPr lang="en-US" sz="1400"/>
-              <a:t>And if you know the basics (what it is, terminology, people, vendors, tools, use cases, ...), your chances are very high.</a:t>
+              <a:t>Sometimes if you demonstrate that you are really excited about </a:t>
+            </a:r>
+          </a:p>
+          <a:p>
+            <a:r>
+              <a:rPr lang="en-US" sz="1400"/>
+              <a:t>this new technology, it is enough toget hired.</a:t>
+            </a:r>
+          </a:p>
+          <a:p>
+            <a:endParaRPr lang="en-US" sz="1400"/>
+          </a:p>
+          <a:p>
+            <a:r>
+              <a:rPr lang="en-US" sz="1400"/>
+              <a:t>And if you know the basics (what it is, terminology, people, vendors, </a:t>
+            </a:r>
+          </a:p>
+          <a:p>
+            <a:r>
+              <a:rPr lang="en-US" sz="1400"/>
+              <a:t>tools, use cases, ...), your chances are very high.</a:t>
             </a:r>
           </a:p>
           <a:p>
@@ -8191,6 +10031,53 @@
           </a:p>
         </p:txBody>
       </p:sp>
+      <p:pic>
+        <p:nvPicPr>
+          <p:cNvPr id="4098" name="Picture 2" descr="8 Impressive Questions to Ask During an Interview - Lifehack">
+            <a:extLst>
+              <a:ext uri="{FF2B5EF4-FFF2-40B4-BE49-F238E27FC236}">
+                <a16:creationId xmlns:a16="http://schemas.microsoft.com/office/drawing/2014/main" id="{61D1D9AA-0BFA-52CB-D8A1-697B4D749B04}"/>
+              </a:ext>
+            </a:extLst>
+          </p:cNvPr>
+          <p:cNvPicPr>
+            <a:picLocks noChangeAspect="1" noChangeArrowheads="1"/>
+          </p:cNvPicPr>
+          <p:nvPr/>
+        </p:nvPicPr>
+        <p:blipFill>
+          <a:blip r:embed="rId2" cstate="email">
+            <a:extLst>
+              <a:ext uri="{28A0092B-C50C-407E-A947-70E740481C1C}">
+                <a14:useLocalDpi xmlns:a14="http://schemas.microsoft.com/office/drawing/2010/main"/>
+              </a:ext>
+            </a:extLst>
+          </a:blip>
+          <a:srcRect/>
+          <a:stretch>
+            <a:fillRect/>
+          </a:stretch>
+        </p:blipFill>
+        <p:spPr bwMode="auto">
+          <a:xfrm>
+            <a:off x="8086184" y="1644984"/>
+            <a:ext cx="3244446" cy="2250122"/>
+          </a:xfrm>
+          <a:prstGeom prst="rect">
+            <a:avLst/>
+          </a:prstGeom>
+          <a:noFill/>
+          <a:extLst>
+            <a:ext uri="{909E8E84-426E-40DD-AFC4-6F175D3DCCD1}">
+              <a14:hiddenFill xmlns:a14="http://schemas.microsoft.com/office/drawing/2010/main">
+                <a:solidFill>
+                  <a:srgbClr val="FFFFFF"/>
+                </a:solidFill>
+              </a14:hiddenFill>
+            </a:ext>
+          </a:extLst>
+        </p:spPr>
+      </p:pic>
     </p:spTree>
     <p:extLst>
       <p:ext uri="{BB962C8B-B14F-4D97-AF65-F5344CB8AC3E}">
@@ -8235,8 +10122,8 @@
         </p:nvSpPr>
         <p:spPr>
           <a:xfrm>
-            <a:off x="2424222" y="1551563"/>
-            <a:ext cx="6900531" cy="3754874"/>
+            <a:off x="254835" y="761201"/>
+            <a:ext cx="5611575" cy="3754874"/>
           </a:xfrm>
           <a:prstGeom prst="rect">
             <a:avLst/>
@@ -8269,14 +10156,30 @@
           </a:p>
           <a:p>
             <a:r>
-              <a:rPr lang="en-US" sz="1400"/>
+              <a:rPr lang="en-US" sz="1400" b="1">
+                <a:solidFill>
+                  <a:srgbClr val="FF0000"/>
+                </a:solidFill>
+              </a:rPr>
               <a:t>Do NOT try to grow incrementally from your previous experience.</a:t>
             </a:r>
           </a:p>
           <a:p>
             <a:r>
               <a:rPr lang="en-US" sz="1400"/>
-              <a:t>Rather make your research, find what is needed - and pull yourself to it.</a:t>
+              <a:t>Rather make your research, find what is needed - and </a:t>
+            </a:r>
+            <a:r>
+              <a:rPr lang="en-US" sz="1400" b="1">
+                <a:solidFill>
+                  <a:srgbClr val="FF0000"/>
+                </a:solidFill>
+              </a:rPr>
+              <a:t>pull yourself to it</a:t>
+            </a:r>
+            <a:r>
+              <a:rPr lang="en-US" sz="1400"/>
+              <a:t>.</a:t>
             </a:r>
           </a:p>
           <a:p>
@@ -8284,13 +10187,21 @@
           </a:p>
           <a:p>
             <a:r>
-              <a:rPr lang="en-US" sz="1400"/>
+              <a:rPr lang="en-US" sz="1400">
+                <a:solidFill>
+                  <a:srgbClr val="00B0F0"/>
+                </a:solidFill>
+              </a:rPr>
               <a:t>Most people define themselves by their prior experience.</a:t>
             </a:r>
           </a:p>
           <a:p>
             <a:r>
-              <a:rPr lang="en-US" sz="1400"/>
+              <a:rPr lang="en-US" sz="1400">
+                <a:solidFill>
+                  <a:srgbClr val="00B0F0"/>
+                </a:solidFill>
+              </a:rPr>
               <a:t>This is a huge mistake.</a:t>
             </a:r>
           </a:p>
@@ -8300,7 +10211,19 @@
           <a:p>
             <a:r>
               <a:rPr lang="en-US" sz="1400"/>
-              <a:t>Because the progress is disruptive.</a:t>
+              <a:t>Because </a:t>
+            </a:r>
+            <a:r>
+              <a:rPr lang="en-US" sz="1400" b="1">
+                <a:solidFill>
+                  <a:srgbClr val="FF0000"/>
+                </a:solidFill>
+              </a:rPr>
+              <a:t>the progress is disruptive</a:t>
+            </a:r>
+            <a:r>
+              <a:rPr lang="en-US" sz="1400"/>
+              <a:t>.</a:t>
             </a:r>
           </a:p>
           <a:p>
@@ -8315,7 +10238,19 @@
           <a:p>
             <a:r>
               <a:rPr lang="en-US" sz="1400"/>
-              <a:t>It is possible (in fact it is easy) to re-define and re-position yourself in just few months.</a:t>
+              <a:t>It is possible/easy to </a:t>
+            </a:r>
+            <a:r>
+              <a:rPr lang="en-US" sz="1400">
+                <a:solidFill>
+                  <a:srgbClr val="FF0000"/>
+                </a:solidFill>
+              </a:rPr>
+              <a:t>re-define and re-position yourself</a:t>
+            </a:r>
+            <a:r>
+              <a:rPr lang="en-US" sz="1400"/>
+              <a:t> in just few months.</a:t>
             </a:r>
           </a:p>
           <a:p>
@@ -8376,6 +10311,318 @@
               <a:rPr lang="en-US" sz="2800" b="1"/>
               <a:t>You can not move forward while looking back</a:t>
             </a:r>
+          </a:p>
+        </p:txBody>
+      </p:sp>
+      <p:pic>
+        <p:nvPicPr>
+          <p:cNvPr id="5122" name="Picture 2" descr="Side view of a walking businessman looking back Stock Photo by ©feedough  88637394">
+            <a:extLst>
+              <a:ext uri="{FF2B5EF4-FFF2-40B4-BE49-F238E27FC236}">
+                <a16:creationId xmlns:a16="http://schemas.microsoft.com/office/drawing/2014/main" id="{6B27004F-C697-BA7F-5C23-ECB87A6526B3}"/>
+              </a:ext>
+            </a:extLst>
+          </p:cNvPr>
+          <p:cNvPicPr>
+            <a:picLocks noChangeAspect="1" noChangeArrowheads="1"/>
+          </p:cNvPicPr>
+          <p:nvPr/>
+        </p:nvPicPr>
+        <p:blipFill rotWithShape="1">
+          <a:blip r:embed="rId2" cstate="email">
+            <a:extLst>
+              <a:ext uri="{28A0092B-C50C-407E-A947-70E740481C1C}">
+                <a14:useLocalDpi xmlns:a14="http://schemas.microsoft.com/office/drawing/2010/main"/>
+              </a:ext>
+            </a:extLst>
+          </a:blip>
+          <a:srcRect/>
+          <a:stretch/>
+        </p:blipFill>
+        <p:spPr bwMode="auto">
+          <a:xfrm>
+            <a:off x="6483856" y="1734977"/>
+            <a:ext cx="1158167" cy="2390024"/>
+          </a:xfrm>
+          <a:prstGeom prst="rect">
+            <a:avLst/>
+          </a:prstGeom>
+          <a:noFill/>
+          <a:extLst>
+            <a:ext uri="{909E8E84-426E-40DD-AFC4-6F175D3DCCD1}">
+              <a14:hiddenFill xmlns:a14="http://schemas.microsoft.com/office/drawing/2010/main">
+                <a:solidFill>
+                  <a:srgbClr val="FFFFFF"/>
+                </a:solidFill>
+              </a14:hiddenFill>
+            </a:ext>
+          </a:extLst>
+        </p:spPr>
+      </p:pic>
+      <p:pic>
+        <p:nvPicPr>
+          <p:cNvPr id="5124" name="Picture 4" descr="How to Do a Muscle Up: An Expert's Guide">
+            <a:extLst>
+              <a:ext uri="{FF2B5EF4-FFF2-40B4-BE49-F238E27FC236}">
+                <a16:creationId xmlns:a16="http://schemas.microsoft.com/office/drawing/2014/main" id="{5210B569-B9ED-C39D-2CD0-D7C0C9064E1E}"/>
+              </a:ext>
+            </a:extLst>
+          </p:cNvPr>
+          <p:cNvPicPr>
+            <a:picLocks noChangeAspect="1" noChangeArrowheads="1"/>
+          </p:cNvPicPr>
+          <p:nvPr/>
+        </p:nvPicPr>
+        <p:blipFill rotWithShape="1">
+          <a:blip r:embed="rId3" cstate="email">
+            <a:extLst>
+              <a:ext uri="{28A0092B-C50C-407E-A947-70E740481C1C}">
+                <a14:useLocalDpi xmlns:a14="http://schemas.microsoft.com/office/drawing/2010/main"/>
+              </a:ext>
+            </a:extLst>
+          </a:blip>
+          <a:srcRect/>
+          <a:stretch/>
+        </p:blipFill>
+        <p:spPr bwMode="auto">
+          <a:xfrm>
+            <a:off x="9417638" y="1920339"/>
+            <a:ext cx="2647507" cy="2019300"/>
+          </a:xfrm>
+          <a:prstGeom prst="rect">
+            <a:avLst/>
+          </a:prstGeom>
+          <a:noFill/>
+          <a:extLst>
+            <a:ext uri="{909E8E84-426E-40DD-AFC4-6F175D3DCCD1}">
+              <a14:hiddenFill xmlns:a14="http://schemas.microsoft.com/office/drawing/2010/main">
+                <a:solidFill>
+                  <a:srgbClr val="FFFFFF"/>
+                </a:solidFill>
+              </a14:hiddenFill>
+            </a:ext>
+          </a:extLst>
+        </p:spPr>
+      </p:pic>
+      <p:sp>
+        <p:nvSpPr>
+          <p:cNvPr id="4" name="TextBox 3">
+            <a:extLst>
+              <a:ext uri="{FF2B5EF4-FFF2-40B4-BE49-F238E27FC236}">
+                <a16:creationId xmlns:a16="http://schemas.microsoft.com/office/drawing/2014/main" id="{4F55E6E2-9F7E-D78F-DF89-7A22735F2012}"/>
+              </a:ext>
+            </a:extLst>
+          </p:cNvPr>
+          <p:cNvSpPr txBox="1"/>
+          <p:nvPr/>
+        </p:nvSpPr>
+        <p:spPr>
+          <a:xfrm>
+            <a:off x="8774603" y="5766530"/>
+            <a:ext cx="837050" cy="307777"/>
+          </a:xfrm>
+          <a:prstGeom prst="rect">
+            <a:avLst/>
+          </a:prstGeom>
+          <a:solidFill>
+            <a:schemeClr val="accent4">
+              <a:lumMod val="20000"/>
+              <a:lumOff val="80000"/>
+            </a:schemeClr>
+          </a:solidFill>
+          <a:ln>
+            <a:solidFill>
+              <a:srgbClr val="FF0000"/>
+            </a:solidFill>
+          </a:ln>
+        </p:spPr>
+        <p:txBody>
+          <a:bodyPr wrap="square" rtlCol="0">
+            <a:spAutoFit/>
+          </a:bodyPr>
+          <a:lstStyle/>
+          <a:p>
+            <a:pPr algn="ctr"/>
+            <a:r>
+              <a:rPr lang="en-US" sz="1400"/>
+              <a:t>You</a:t>
+            </a:r>
+          </a:p>
+        </p:txBody>
+      </p:sp>
+      <p:sp>
+        <p:nvSpPr>
+          <p:cNvPr id="5" name="TextBox 4">
+            <a:extLst>
+              <a:ext uri="{FF2B5EF4-FFF2-40B4-BE49-F238E27FC236}">
+                <a16:creationId xmlns:a16="http://schemas.microsoft.com/office/drawing/2014/main" id="{08A56232-BAB5-6CDE-EDA5-0DE3C394027E}"/>
+              </a:ext>
+            </a:extLst>
+          </p:cNvPr>
+          <p:cNvSpPr txBox="1"/>
+          <p:nvPr/>
+        </p:nvSpPr>
+        <p:spPr>
+          <a:xfrm>
+            <a:off x="6325592" y="4163726"/>
+            <a:ext cx="1714003" cy="523220"/>
+          </a:xfrm>
+          <a:prstGeom prst="rect">
+            <a:avLst/>
+          </a:prstGeom>
+          <a:noFill/>
+        </p:spPr>
+        <p:txBody>
+          <a:bodyPr wrap="square" rtlCol="0">
+            <a:spAutoFit/>
+          </a:bodyPr>
+          <a:lstStyle/>
+          <a:p>
+            <a:pPr algn="ctr"/>
+            <a:r>
+              <a:rPr lang="en-US" sz="1400"/>
+              <a:t>Old familiar, commodity, routine</a:t>
+            </a:r>
+          </a:p>
+        </p:txBody>
+      </p:sp>
+      <p:sp>
+        <p:nvSpPr>
+          <p:cNvPr id="6" name="TextBox 5">
+            <a:extLst>
+              <a:ext uri="{FF2B5EF4-FFF2-40B4-BE49-F238E27FC236}">
+                <a16:creationId xmlns:a16="http://schemas.microsoft.com/office/drawing/2014/main" id="{0E762CED-A9E1-01E5-7802-BD69F0220083}"/>
+              </a:ext>
+            </a:extLst>
+          </p:cNvPr>
+          <p:cNvSpPr txBox="1"/>
+          <p:nvPr/>
+        </p:nvSpPr>
+        <p:spPr>
+          <a:xfrm>
+            <a:off x="9884389" y="4113682"/>
+            <a:ext cx="1714003" cy="523220"/>
+          </a:xfrm>
+          <a:prstGeom prst="rect">
+            <a:avLst/>
+          </a:prstGeom>
+          <a:noFill/>
+        </p:spPr>
+        <p:txBody>
+          <a:bodyPr wrap="square" rtlCol="0">
+            <a:spAutoFit/>
+          </a:bodyPr>
+          <a:lstStyle/>
+          <a:p>
+            <a:pPr algn="ctr"/>
+            <a:r>
+              <a:rPr lang="en-US" sz="1400"/>
+              <a:t>New, exciting, unknown, a bit scary</a:t>
+            </a:r>
+          </a:p>
+        </p:txBody>
+      </p:sp>
+      <p:sp>
+        <p:nvSpPr>
+          <p:cNvPr id="7" name="Down Arrow 6">
+            <a:extLst>
+              <a:ext uri="{FF2B5EF4-FFF2-40B4-BE49-F238E27FC236}">
+                <a16:creationId xmlns:a16="http://schemas.microsoft.com/office/drawing/2014/main" id="{E7DB1CD8-662A-9936-C11C-09E06DDF7753}"/>
+              </a:ext>
+            </a:extLst>
+          </p:cNvPr>
+          <p:cNvSpPr/>
+          <p:nvPr/>
+        </p:nvSpPr>
+        <p:spPr>
+          <a:xfrm rot="8819602">
+            <a:off x="8419605" y="4821382"/>
+            <a:ext cx="160983" cy="760021"/>
+          </a:xfrm>
+          <a:prstGeom prst="downArrow">
+            <a:avLst/>
+          </a:prstGeom>
+          <a:solidFill>
+            <a:schemeClr val="accent1">
+              <a:lumMod val="40000"/>
+              <a:lumOff val="60000"/>
+            </a:schemeClr>
+          </a:solidFill>
+        </p:spPr>
+        <p:style>
+          <a:lnRef idx="2">
+            <a:schemeClr val="accent1">
+              <a:shade val="50000"/>
+            </a:schemeClr>
+          </a:lnRef>
+          <a:fillRef idx="1">
+            <a:schemeClr val="accent1"/>
+          </a:fillRef>
+          <a:effectRef idx="0">
+            <a:schemeClr val="accent1"/>
+          </a:effectRef>
+          <a:fontRef idx="minor">
+            <a:schemeClr val="lt1"/>
+          </a:fontRef>
+        </p:style>
+        <p:txBody>
+          <a:bodyPr rtlCol="0" anchor="ctr"/>
+          <a:lstStyle/>
+          <a:p>
+            <a:pPr algn="ctr"/>
+            <a:endParaRPr lang="en-US"/>
+          </a:p>
+        </p:txBody>
+      </p:sp>
+      <p:sp>
+        <p:nvSpPr>
+          <p:cNvPr id="8" name="Down Arrow 7">
+            <a:extLst>
+              <a:ext uri="{FF2B5EF4-FFF2-40B4-BE49-F238E27FC236}">
+                <a16:creationId xmlns:a16="http://schemas.microsoft.com/office/drawing/2014/main" id="{1A26D78A-D859-36AF-F6EE-ADE9B424E3FC}"/>
+              </a:ext>
+            </a:extLst>
+          </p:cNvPr>
+          <p:cNvSpPr/>
+          <p:nvPr/>
+        </p:nvSpPr>
+        <p:spPr>
+          <a:xfrm rot="12471296">
+            <a:off x="9779880" y="4821383"/>
+            <a:ext cx="160983" cy="760021"/>
+          </a:xfrm>
+          <a:prstGeom prst="downArrow">
+            <a:avLst/>
+          </a:prstGeom>
+          <a:solidFill>
+            <a:schemeClr val="accent1">
+              <a:lumMod val="40000"/>
+              <a:lumOff val="60000"/>
+            </a:schemeClr>
+          </a:solidFill>
+        </p:spPr>
+        <p:style>
+          <a:lnRef idx="2">
+            <a:schemeClr val="accent1">
+              <a:shade val="50000"/>
+            </a:schemeClr>
+          </a:lnRef>
+          <a:fillRef idx="1">
+            <a:schemeClr val="accent1"/>
+          </a:fillRef>
+          <a:effectRef idx="0">
+            <a:schemeClr val="accent1"/>
+          </a:effectRef>
+          <a:fontRef idx="minor">
+            <a:schemeClr val="lt1"/>
+          </a:fontRef>
+        </p:style>
+        <p:txBody>
+          <a:bodyPr rtlCol="0" anchor="ctr"/>
+          <a:lstStyle/>
+          <a:p>
+            <a:pPr algn="ctr"/>
+            <a:endParaRPr lang="en-US"/>
           </a:p>
         </p:txBody>
       </p:sp>

--- a/Job_Searching.pptx
+++ b/Job_Searching.pptx
@@ -9483,7 +9483,7 @@
         </p:nvSpPr>
         <p:spPr>
           <a:xfrm>
-            <a:off x="626906" y="1269417"/>
+            <a:off x="450465" y="803656"/>
             <a:ext cx="6462663" cy="3539430"/>
           </a:xfrm>
           <a:prstGeom prst="rect">
@@ -9652,7 +9652,7 @@
         </p:blipFill>
         <p:spPr>
           <a:xfrm>
-            <a:off x="8510204" y="1493578"/>
+            <a:off x="8576153" y="686937"/>
             <a:ext cx="2122871" cy="2461733"/>
           </a:xfrm>
           <a:prstGeom prst="rect">
@@ -9674,7 +9674,7 @@
         </p:nvSpPr>
         <p:spPr>
           <a:xfrm>
-            <a:off x="7868094" y="3955311"/>
+            <a:off x="7934043" y="3148670"/>
             <a:ext cx="4068726" cy="984885"/>
           </a:xfrm>
           <a:prstGeom prst="rect">
@@ -9746,6 +9746,166 @@
           </a:p>
         </p:txBody>
       </p:sp>
+      <p:sp>
+        <p:nvSpPr>
+          <p:cNvPr id="6" name="TextBox 5">
+            <a:extLst>
+              <a:ext uri="{FF2B5EF4-FFF2-40B4-BE49-F238E27FC236}">
+                <a16:creationId xmlns:a16="http://schemas.microsoft.com/office/drawing/2014/main" id="{5838D4DB-5A98-2121-60E3-0D3F92BE7F23}"/>
+              </a:ext>
+            </a:extLst>
+          </p:cNvPr>
+          <p:cNvSpPr txBox="1"/>
+          <p:nvPr/>
+        </p:nvSpPr>
+        <p:spPr>
+          <a:xfrm>
+            <a:off x="1983179" y="4645958"/>
+            <a:ext cx="4572000" cy="2031325"/>
+          </a:xfrm>
+          <a:prstGeom prst="rect">
+            <a:avLst/>
+          </a:prstGeom>
+          <a:solidFill>
+            <a:schemeClr val="accent4">
+              <a:lumMod val="20000"/>
+              <a:lumOff val="80000"/>
+            </a:schemeClr>
+          </a:solidFill>
+          <a:ln>
+            <a:solidFill>
+              <a:srgbClr val="FF0000"/>
+            </a:solidFill>
+          </a:ln>
+        </p:spPr>
+        <p:txBody>
+          <a:bodyPr wrap="square" rtlCol="0">
+            <a:spAutoFit/>
+          </a:bodyPr>
+          <a:lstStyle/>
+          <a:p>
+            <a:r>
+              <a:rPr lang="en-US" sz="1400"/>
+              <a:t>During the face-to-face interview you can do the following:</a:t>
+            </a:r>
+          </a:p>
+          <a:p>
+            <a:pPr marL="285750" indent="-285750">
+              <a:buFont typeface="Arial" panose="020B0604020202020204" pitchFamily="34" charset="0"/>
+              <a:buChar char="•"/>
+            </a:pPr>
+            <a:r>
+              <a:rPr lang="en-US" sz="1400"/>
+              <a:t>smile, be positive, feel good</a:t>
+            </a:r>
+          </a:p>
+          <a:p>
+            <a:pPr marL="285750" indent="-285750">
+              <a:buFont typeface="Arial" panose="020B0604020202020204" pitchFamily="34" charset="0"/>
+              <a:buChar char="•"/>
+            </a:pPr>
+            <a:r>
+              <a:rPr lang="en-US" sz="1400"/>
+              <a:t>be attentive and supporting listener</a:t>
+            </a:r>
+          </a:p>
+          <a:p>
+            <a:pPr marL="285750" indent="-285750">
+              <a:buFont typeface="Arial" panose="020B0604020202020204" pitchFamily="34" charset="0"/>
+              <a:buChar char="•"/>
+            </a:pPr>
+            <a:r>
+              <a:rPr lang="en-US" sz="1400"/>
+              <a:t>be a cheerleader for the other person</a:t>
+            </a:r>
+          </a:p>
+          <a:p>
+            <a:pPr marL="285750" indent="-285750">
+              <a:buFont typeface="Arial" panose="020B0604020202020204" pitchFamily="34" charset="0"/>
+              <a:buChar char="•"/>
+            </a:pPr>
+            <a:r>
+              <a:rPr lang="en-US" sz="1400"/>
+              <a:t>be happy and relaxed</a:t>
+            </a:r>
+          </a:p>
+          <a:p>
+            <a:pPr marL="285750" indent="-285750">
+              <a:buFont typeface="Arial" panose="020B0604020202020204" pitchFamily="34" charset="0"/>
+              <a:buChar char="•"/>
+            </a:pPr>
+            <a:r>
+              <a:rPr lang="en-US" sz="1400"/>
+              <a:t>radiate bubbling positive energy </a:t>
+            </a:r>
+          </a:p>
+          <a:p>
+            <a:pPr marL="285750" indent="-285750">
+              <a:buFont typeface="Arial" panose="020B0604020202020204" pitchFamily="34" charset="0"/>
+              <a:buChar char="•"/>
+            </a:pPr>
+            <a:r>
+              <a:rPr lang="en-US" sz="1400"/>
+              <a:t>build trust, be authentic</a:t>
+            </a:r>
+          </a:p>
+          <a:p>
+            <a:pPr marL="285750" indent="-285750">
+              <a:buFont typeface="Arial" panose="020B0604020202020204" pitchFamily="34" charset="0"/>
+              <a:buChar char="•"/>
+            </a:pPr>
+            <a:r>
+              <a:rPr lang="en-US" sz="1400"/>
+              <a:t>be excited and curious about the person, technology, project, company</a:t>
+            </a:r>
+          </a:p>
+        </p:txBody>
+      </p:sp>
+      <p:pic>
+        <p:nvPicPr>
+          <p:cNvPr id="1028" name="Picture 4" descr="Smile! How smiling helps baby development | Raising Children Network">
+            <a:extLst>
+              <a:ext uri="{FF2B5EF4-FFF2-40B4-BE49-F238E27FC236}">
+                <a16:creationId xmlns:a16="http://schemas.microsoft.com/office/drawing/2014/main" id="{FC0D567F-936F-97C6-54C8-59125AA6909E}"/>
+              </a:ext>
+            </a:extLst>
+          </p:cNvPr>
+          <p:cNvPicPr>
+            <a:picLocks noChangeAspect="1" noChangeArrowheads="1"/>
+          </p:cNvPicPr>
+          <p:nvPr/>
+        </p:nvPicPr>
+        <p:blipFill rotWithShape="1">
+          <a:blip r:embed="rId5" cstate="email">
+            <a:extLst>
+              <a:ext uri="{28A0092B-C50C-407E-A947-70E740481C1C}">
+                <a14:useLocalDpi xmlns:a14="http://schemas.microsoft.com/office/drawing/2010/main"/>
+              </a:ext>
+            </a:extLst>
+          </a:blip>
+          <a:srcRect/>
+          <a:stretch/>
+        </p:blipFill>
+        <p:spPr bwMode="auto">
+          <a:xfrm>
+            <a:off x="6686179" y="4727954"/>
+            <a:ext cx="1973101" cy="1867334"/>
+          </a:xfrm>
+          <a:prstGeom prst="rect">
+            <a:avLst/>
+          </a:prstGeom>
+          <a:noFill/>
+          <a:extLst>
+            <a:ext uri="{909E8E84-426E-40DD-AFC4-6F175D3DCCD1}">
+              <a14:hiddenFill xmlns:a14="http://schemas.microsoft.com/office/drawing/2010/main">
+                <a:solidFill>
+                  <a:srgbClr val="FFFFFF"/>
+                </a:solidFill>
+              </a14:hiddenFill>
+            </a:ext>
+          </a:extLst>
+        </p:spPr>
+      </p:pic>
     </p:spTree>
     <p:extLst>
       <p:ext uri="{BB962C8B-B14F-4D97-AF65-F5344CB8AC3E}">
